--- a/配图备选/参考配色版/配图_图1图5图6图8_可编辑.pptx
+++ b/配图备选/参考配色版/配图_图1图5图6图8_可编辑.pptx
@@ -9,6 +9,7 @@
     <p:sldId id="257" r:id="rId8"/>
     <p:sldId id="258" r:id="rId9"/>
     <p:sldId id="259" r:id="rId10"/>
+    <p:sldId id="260" r:id="rId11"/>
   </p:sldIdLst>
   <p:sldSz cx="15120000" cy="10692000" type="screen4x3"/>
   <p:notesSz cx="6858000" cy="9144000"/>
@@ -14641,6 +14642,3397 @@
 </file>
 
 <file path=ppt/slides/slide4.xml><?xml version="1.0" encoding="utf-8"?>
+<p:sld xmlns:a="http://schemas.openxmlformats.org/drawingml/2006/main" xmlns:p="http://schemas.openxmlformats.org/presentationml/2006/main" xmlns:r="http://schemas.openxmlformats.org/officeDocument/2006/relationships">
+  <p:cSld>
+    <p:spTree>
+      <p:nvGrpSpPr>
+        <p:cNvPr id="1" name=""/>
+        <p:cNvGrpSpPr/>
+        <p:nvPr/>
+      </p:nvGrpSpPr>
+      <p:grpSpPr/>
+      <p:sp>
+        <p:nvSpPr>
+          <p:cNvPr id="2" name="Rectangle 1"/>
+          <p:cNvSpPr/>
+          <p:nvPr/>
+        </p:nvSpPr>
+        <p:spPr>
+          <a:xfrm>
+            <a:off x="216000" y="1191818"/>
+            <a:ext cx="14688000" cy="8308363"/>
+          </a:xfrm>
+          <a:prstGeom prst="rect">
+            <a:avLst/>
+          </a:prstGeom>
+          <a:solidFill>
+            <a:srgbClr val="F4F3ED"/>
+          </a:solidFill>
+          <a:ln>
+            <a:noFill/>
+          </a:ln>
+          <a:effectLst/>
+        </p:spPr>
+        <p:txBody>
+          <a:bodyPr rtlCol="0" anchor="ctr"/>
+          <a:lstStyle/>
+          <a:p>
+            <a:pPr algn="ctr"/>
+          </a:p>
+        </p:txBody>
+      </p:sp>
+      <p:sp>
+        <p:nvSpPr>
+          <p:cNvPr id="3" name="TextBox 2"/>
+          <p:cNvSpPr txBox="1"/>
+          <p:nvPr/>
+        </p:nvSpPr>
+        <p:spPr>
+          <a:xfrm>
+            <a:off x="631418" y="1346858"/>
+            <a:ext cx="474088" cy="380552"/>
+          </a:xfrm>
+          <a:prstGeom prst="rect">
+            <a:avLst/>
+          </a:prstGeom>
+          <a:noFill/>
+        </p:spPr>
+        <p:txBody>
+          <a:bodyPr wrap="none" lIns="0" rIns="0" tIns="0" bIns="0" anchor="ctr">
+            <a:spAutoFit/>
+          </a:bodyPr>
+          <a:lstStyle/>
+          <a:p>
+            <a:pPr algn="l">
+              <a:lnSpc>
+                <a:spcPct val="128000"/>
+              </a:lnSpc>
+            </a:pPr>
+            <a:r>
+              <a:rPr sz="1577" b="1">
+                <a:solidFill>
+                  <a:srgbClr val="31332C"/>
+                </a:solidFill>
+                <a:latin typeface="Microsoft YaHei"/>
+                <a:ea typeface="Microsoft YaHei"/>
+                <a:cs typeface="Microsoft YaHei"/>
+              </a:rPr>
+              <a:t>图8</a:t>
+            </a:r>
+          </a:p>
+        </p:txBody>
+      </p:sp>
+      <p:sp>
+        <p:nvSpPr>
+          <p:cNvPr id="4" name="TextBox 3"/>
+          <p:cNvSpPr txBox="1"/>
+          <p:nvPr/>
+        </p:nvSpPr>
+        <p:spPr>
+          <a:xfrm>
+            <a:off x="972654" y="1404720"/>
+            <a:ext cx="2934929" cy="295985"/>
+          </a:xfrm>
+          <a:prstGeom prst="rect">
+            <a:avLst/>
+          </a:prstGeom>
+          <a:noFill/>
+        </p:spPr>
+        <p:txBody>
+          <a:bodyPr wrap="none" lIns="0" rIns="0" tIns="0" bIns="0" anchor="ctr">
+            <a:spAutoFit/>
+          </a:bodyPr>
+          <a:lstStyle/>
+          <a:p>
+            <a:pPr algn="l">
+              <a:lnSpc>
+                <a:spcPct val="128000"/>
+              </a:lnSpc>
+            </a:pPr>
+            <a:r>
+              <a:rPr sz="1226" b="0">
+                <a:solidFill>
+                  <a:srgbClr val="31332C"/>
+                </a:solidFill>
+                <a:latin typeface="Microsoft YaHei"/>
+                <a:ea typeface="Microsoft YaHei"/>
+                <a:cs typeface="Microsoft YaHei"/>
+              </a:rPr>
+              <a:t>高校共享道路安全引导系统需求清单</a:t>
+            </a:r>
+          </a:p>
+        </p:txBody>
+      </p:sp>
+      <p:sp>
+        <p:nvSpPr>
+          <p:cNvPr id="5" name="TextBox 4"/>
+          <p:cNvSpPr txBox="1"/>
+          <p:nvPr/>
+        </p:nvSpPr>
+        <p:spPr>
+          <a:xfrm>
+            <a:off x="631418" y="1694770"/>
+            <a:ext cx="5828109" cy="197323"/>
+          </a:xfrm>
+          <a:prstGeom prst="rect">
+            <a:avLst/>
+          </a:prstGeom>
+          <a:noFill/>
+        </p:spPr>
+        <p:txBody>
+          <a:bodyPr wrap="none" lIns="0" rIns="0" tIns="0" bIns="0" anchor="ctr">
+            <a:spAutoFit/>
+          </a:bodyPr>
+          <a:lstStyle/>
+          <a:p>
+            <a:pPr algn="l">
+              <a:lnSpc>
+                <a:spcPct val="128000"/>
+              </a:lnSpc>
+            </a:pPr>
+            <a:r>
+              <a:rPr sz="817" b="0">
+                <a:solidFill>
+                  <a:srgbClr val="8A8D80"/>
+                </a:solidFill>
+                <a:latin typeface="Microsoft YaHei"/>
+                <a:ea typeface="Microsoft YaHei"/>
+                <a:cs typeface="Microsoft YaHei"/>
+              </a:rPr>
+              <a:t>共 14 项需求，依 Kano 模型分为基本／期望／兴奋三类；需求项与分类取自表34，实施遵循“先基础后提升”</a:t>
+            </a:r>
+          </a:p>
+        </p:txBody>
+      </p:sp>
+      <p:cxnSp>
+        <p:nvCxnSpPr>
+          <p:cNvPr id="6" name="Connector 5"/>
+          <p:cNvCxnSpPr/>
+          <p:nvPr/>
+        </p:nvCxnSpPr>
+        <p:spPr>
+          <a:xfrm>
+            <a:off x="631418" y="1963309"/>
+            <a:ext cx="13857163" cy="0"/>
+          </a:xfrm>
+          <a:prstGeom prst="line">
+            <a:avLst/>
+          </a:prstGeom>
+          <a:ln w="9643">
+            <a:solidFill>
+              <a:srgbClr val="D2D2C8"/>
+            </a:solidFill>
+          </a:ln>
+          <a:effectLst/>
+        </p:spPr>
+      </p:cxnSp>
+      <p:sp>
+        <p:nvSpPr>
+          <p:cNvPr id="7" name="需求带-兴奋需求"/>
+          <p:cNvSpPr/>
+          <p:nvPr/>
+        </p:nvSpPr>
+        <p:spPr>
+          <a:xfrm>
+            <a:off x="705600" y="2527090"/>
+            <a:ext cx="12966981" cy="1631999"/>
+          </a:xfrm>
+          <a:prstGeom prst="roundRect">
+            <a:avLst>
+              <a:gd name="adj" fmla="val 5454"/>
+            </a:avLst>
+          </a:prstGeom>
+          <a:solidFill>
+            <a:srgbClr val="DFE5E8">
+              <a:alpha val="45000"/>
+            </a:srgbClr>
+          </a:solidFill>
+          <a:ln>
+            <a:noFill/>
+          </a:ln>
+          <a:effectLst/>
+        </p:spPr>
+        <p:txBody>
+          <a:bodyPr rtlCol="0" anchor="ctr"/>
+          <a:lstStyle/>
+          <a:p>
+            <a:pPr algn="ctr"/>
+          </a:p>
+        </p:txBody>
+      </p:sp>
+      <p:sp>
+        <p:nvSpPr>
+          <p:cNvPr id="8" name="Rounded Rectangle 7"/>
+          <p:cNvSpPr/>
+          <p:nvPr/>
+        </p:nvSpPr>
+        <p:spPr>
+          <a:xfrm>
+            <a:off x="705600" y="2527090"/>
+            <a:ext cx="2967272" cy="1631999"/>
+          </a:xfrm>
+          <a:prstGeom prst="roundRect">
+            <a:avLst>
+              <a:gd name="adj" fmla="val 5454"/>
+            </a:avLst>
+          </a:prstGeom>
+          <a:solidFill>
+            <a:srgbClr val="A6B2B9"/>
+          </a:solidFill>
+          <a:ln>
+            <a:noFill/>
+          </a:ln>
+          <a:effectLst/>
+        </p:spPr>
+        <p:txBody>
+          <a:bodyPr rtlCol="0" anchor="ctr"/>
+          <a:lstStyle/>
+          <a:p>
+            <a:pPr algn="ctr"/>
+          </a:p>
+        </p:txBody>
+      </p:sp>
+      <p:sp>
+        <p:nvSpPr>
+          <p:cNvPr id="9" name="Rectangle 8"/>
+          <p:cNvSpPr/>
+          <p:nvPr/>
+        </p:nvSpPr>
+        <p:spPr>
+          <a:xfrm>
+            <a:off x="2782690" y="2527090"/>
+            <a:ext cx="1379781" cy="1631999"/>
+          </a:xfrm>
+          <a:prstGeom prst="rect">
+            <a:avLst/>
+          </a:prstGeom>
+          <a:solidFill>
+            <a:srgbClr val="A6B2B9"/>
+          </a:solidFill>
+          <a:ln>
+            <a:noFill/>
+          </a:ln>
+          <a:effectLst/>
+        </p:spPr>
+        <p:txBody>
+          <a:bodyPr rtlCol="0" anchor="ctr"/>
+          <a:lstStyle/>
+          <a:p>
+            <a:pPr algn="ctr"/>
+          </a:p>
+        </p:txBody>
+      </p:sp>
+      <p:sp>
+        <p:nvSpPr>
+          <p:cNvPr id="10" name="TextBox 9"/>
+          <p:cNvSpPr txBox="1"/>
+          <p:nvPr/>
+        </p:nvSpPr>
+        <p:spPr>
+          <a:xfrm>
+            <a:off x="913309" y="2706610"/>
+            <a:ext cx="995223" cy="366458"/>
+          </a:xfrm>
+          <a:prstGeom prst="rect">
+            <a:avLst/>
+          </a:prstGeom>
+          <a:noFill/>
+        </p:spPr>
+        <p:txBody>
+          <a:bodyPr wrap="none" lIns="0" rIns="0" tIns="0" bIns="0" anchor="ctr">
+            <a:spAutoFit/>
+          </a:bodyPr>
+          <a:lstStyle/>
+          <a:p>
+            <a:pPr algn="l">
+              <a:lnSpc>
+                <a:spcPct val="128000"/>
+              </a:lnSpc>
+            </a:pPr>
+            <a:r>
+              <a:rPr sz="1518" b="1">
+                <a:solidFill>
+                  <a:srgbClr val="FFFFFF"/>
+                </a:solidFill>
+                <a:latin typeface="Microsoft YaHei"/>
+                <a:ea typeface="Microsoft YaHei"/>
+                <a:cs typeface="Microsoft YaHei"/>
+              </a:rPr>
+              <a:t>兴奋需求</a:t>
+            </a:r>
+          </a:p>
+        </p:txBody>
+      </p:sp>
+      <p:sp>
+        <p:nvSpPr>
+          <p:cNvPr id="11" name="TextBox 10"/>
+          <p:cNvSpPr txBox="1"/>
+          <p:nvPr/>
+        </p:nvSpPr>
+        <p:spPr>
+          <a:xfrm>
+            <a:off x="1803490" y="2807498"/>
+            <a:ext cx="713480" cy="197323"/>
+          </a:xfrm>
+          <a:prstGeom prst="rect">
+            <a:avLst/>
+          </a:prstGeom>
+          <a:noFill/>
+        </p:spPr>
+        <p:txBody>
+          <a:bodyPr wrap="none" lIns="0" rIns="0" tIns="0" bIns="0" anchor="ctr">
+            <a:spAutoFit/>
+          </a:bodyPr>
+          <a:lstStyle/>
+          <a:p>
+            <a:pPr algn="l">
+              <a:lnSpc>
+                <a:spcPct val="128000"/>
+              </a:lnSpc>
+            </a:pPr>
+            <a:r>
+              <a:rPr sz="817" b="0">
+                <a:solidFill>
+                  <a:srgbClr val="FFFFFF">
+                    <a:alpha val="78000"/>
+                  </a:srgbClr>
+                </a:solidFill>
+                <a:latin typeface="Microsoft YaHei"/>
+                <a:ea typeface="Microsoft YaHei"/>
+                <a:cs typeface="Microsoft YaHei"/>
+              </a:rPr>
+              <a:t>Attractive</a:t>
+            </a:r>
+          </a:p>
+        </p:txBody>
+      </p:sp>
+      <p:sp>
+        <p:nvSpPr>
+          <p:cNvPr id="12" name="Rounded Rectangle 11"/>
+          <p:cNvSpPr/>
+          <p:nvPr/>
+        </p:nvSpPr>
+        <p:spPr>
+          <a:xfrm>
+            <a:off x="913309" y="3105709"/>
+            <a:ext cx="771490" cy="222545"/>
+          </a:xfrm>
+          <a:prstGeom prst="roundRect">
+            <a:avLst>
+              <a:gd name="adj" fmla="val 50000"/>
+            </a:avLst>
+          </a:prstGeom>
+          <a:solidFill>
+            <a:srgbClr val="FFFFFF">
+              <a:alpha val="24000"/>
+            </a:srgbClr>
+          </a:solidFill>
+          <a:ln>
+            <a:noFill/>
+          </a:ln>
+          <a:effectLst/>
+        </p:spPr>
+        <p:txBody>
+          <a:bodyPr rtlCol="0" anchor="ctr" wrap="none" lIns="0" rIns="0" tIns="0" bIns="0"/>
+          <a:lstStyle/>
+          <a:p>
+            <a:pPr algn="ctr">
+              <a:lnSpc>
+                <a:spcPct val="128000"/>
+              </a:lnSpc>
+            </a:pPr>
+            <a:r>
+              <a:rPr sz="846" b="1">
+                <a:solidFill>
+                  <a:srgbClr val="FFFFFF"/>
+                </a:solidFill>
+                <a:latin typeface="Microsoft YaHei"/>
+                <a:ea typeface="Microsoft YaHei"/>
+                <a:cs typeface="Microsoft YaHei"/>
+              </a:rPr>
+              <a:t>P2   5 项</a:t>
+            </a:r>
+          </a:p>
+        </p:txBody>
+      </p:sp>
+      <p:sp>
+        <p:nvSpPr>
+          <p:cNvPr id="13" name="TextBox 12"/>
+          <p:cNvSpPr txBox="1"/>
+          <p:nvPr/>
+        </p:nvSpPr>
+        <p:spPr>
+          <a:xfrm>
+            <a:off x="913309" y="3479956"/>
+            <a:ext cx="2115072" cy="190276"/>
+          </a:xfrm>
+          <a:prstGeom prst="rect">
+            <a:avLst/>
+          </a:prstGeom>
+          <a:noFill/>
+        </p:spPr>
+        <p:txBody>
+          <a:bodyPr wrap="none" lIns="0" rIns="0" tIns="0" bIns="0" anchor="ctr">
+            <a:spAutoFit/>
+          </a:bodyPr>
+          <a:lstStyle/>
+          <a:p>
+            <a:pPr algn="l">
+              <a:lnSpc>
+                <a:spcPct val="128000"/>
+              </a:lnSpc>
+            </a:pPr>
+            <a:r>
+              <a:rPr sz="788" b="0">
+                <a:solidFill>
+                  <a:srgbClr val="FFFFFF">
+                    <a:alpha val="88000"/>
+                  </a:srgbClr>
+                </a:solidFill>
+                <a:latin typeface="Microsoft YaHei"/>
+                <a:ea typeface="Microsoft YaHei"/>
+                <a:cs typeface="Microsoft YaHei"/>
+              </a:rPr>
+              <a:t>超出使用者基本预期，缺失不引发不满，</a:t>
+            </a:r>
+          </a:p>
+        </p:txBody>
+      </p:sp>
+      <p:sp>
+        <p:nvSpPr>
+          <p:cNvPr id="14" name="TextBox 13"/>
+          <p:cNvSpPr txBox="1"/>
+          <p:nvPr/>
+        </p:nvSpPr>
+        <p:spPr>
+          <a:xfrm>
+            <a:off x="913309" y="3657992"/>
+            <a:ext cx="1087579" cy="190276"/>
+          </a:xfrm>
+          <a:prstGeom prst="rect">
+            <a:avLst/>
+          </a:prstGeom>
+          <a:noFill/>
+        </p:spPr>
+        <p:txBody>
+          <a:bodyPr wrap="none" lIns="0" rIns="0" tIns="0" bIns="0" anchor="ctr">
+            <a:spAutoFit/>
+          </a:bodyPr>
+          <a:lstStyle/>
+          <a:p>
+            <a:pPr algn="l">
+              <a:lnSpc>
+                <a:spcPct val="128000"/>
+              </a:lnSpc>
+            </a:pPr>
+            <a:r>
+              <a:rPr sz="788" b="0">
+                <a:solidFill>
+                  <a:srgbClr val="FFFFFF">
+                    <a:alpha val="88000"/>
+                  </a:srgbClr>
+                </a:solidFill>
+                <a:latin typeface="Microsoft YaHei"/>
+                <a:ea typeface="Microsoft YaHei"/>
+                <a:cs typeface="Microsoft YaHei"/>
+              </a:rPr>
+              <a:t>具备则显著提升体验</a:t>
+            </a:r>
+          </a:p>
+        </p:txBody>
+      </p:sp>
+      <p:sp>
+        <p:nvSpPr>
+          <p:cNvPr id="15" name="需求-动态流量显示"/>
+          <p:cNvSpPr/>
+          <p:nvPr/>
+        </p:nvSpPr>
+        <p:spPr>
+          <a:xfrm>
+            <a:off x="3939927" y="2957345"/>
+            <a:ext cx="1765527" cy="771490"/>
+          </a:xfrm>
+          <a:prstGeom prst="roundRect">
+            <a:avLst>
+              <a:gd name="adj" fmla="val 9615"/>
+            </a:avLst>
+          </a:prstGeom>
+          <a:solidFill>
+            <a:srgbClr val="FCFBF7"/>
+          </a:solidFill>
+          <a:ln w="10385">
+            <a:solidFill>
+              <a:srgbClr val="A6B2B9"/>
+            </a:solidFill>
+          </a:ln>
+          <a:effectLst/>
+        </p:spPr>
+        <p:txBody>
+          <a:bodyPr rtlCol="0" anchor="ctr"/>
+          <a:lstStyle/>
+          <a:p>
+            <a:pPr algn="ctr"/>
+          </a:p>
+        </p:txBody>
+      </p:sp>
+      <p:sp>
+        <p:nvSpPr>
+          <p:cNvPr id="16" name="TextBox 15"/>
+          <p:cNvSpPr txBox="1"/>
+          <p:nvPr/>
+        </p:nvSpPr>
+        <p:spPr>
+          <a:xfrm>
+            <a:off x="4270778" y="3105709"/>
+            <a:ext cx="1103825" cy="281890"/>
+          </a:xfrm>
+          <a:prstGeom prst="rect">
+            <a:avLst/>
+          </a:prstGeom>
+          <a:noFill/>
+        </p:spPr>
+        <p:txBody>
+          <a:bodyPr wrap="none" lIns="0" rIns="0" tIns="0" bIns="0" anchor="ctr">
+            <a:spAutoFit/>
+          </a:bodyPr>
+          <a:lstStyle/>
+          <a:p>
+            <a:pPr algn="ctr">
+              <a:lnSpc>
+                <a:spcPct val="128000"/>
+              </a:lnSpc>
+            </a:pPr>
+            <a:r>
+              <a:rPr sz="1168" b="1">
+                <a:solidFill>
+                  <a:srgbClr val="31332C"/>
+                </a:solidFill>
+                <a:latin typeface="Microsoft YaHei"/>
+                <a:ea typeface="Microsoft YaHei"/>
+                <a:cs typeface="Microsoft YaHei"/>
+              </a:rPr>
+              <a:t>动态流量显示</a:t>
+            </a:r>
+          </a:p>
+        </p:txBody>
+      </p:sp>
+      <p:sp>
+        <p:nvSpPr>
+          <p:cNvPr id="17" name="Rounded Rectangle 16"/>
+          <p:cNvSpPr/>
+          <p:nvPr/>
+        </p:nvSpPr>
+        <p:spPr>
+          <a:xfrm>
+            <a:off x="4644654" y="3402436"/>
+            <a:ext cx="356072" cy="178036"/>
+          </a:xfrm>
+          <a:prstGeom prst="roundRect">
+            <a:avLst>
+              <a:gd name="adj" fmla="val 50000"/>
+            </a:avLst>
+          </a:prstGeom>
+          <a:solidFill>
+            <a:srgbClr val="DFE5E8"/>
+          </a:solidFill>
+          <a:ln>
+            <a:noFill/>
+          </a:ln>
+          <a:effectLst/>
+        </p:spPr>
+        <p:txBody>
+          <a:bodyPr rtlCol="0" anchor="ctr" wrap="none" lIns="0" rIns="0" tIns="0" bIns="0"/>
+          <a:lstStyle/>
+          <a:p>
+            <a:pPr algn="ctr">
+              <a:lnSpc>
+                <a:spcPct val="128000"/>
+              </a:lnSpc>
+            </a:pPr>
+            <a:r>
+              <a:rPr sz="759" b="1">
+                <a:solidFill>
+                  <a:srgbClr val="A6B2B9"/>
+                </a:solidFill>
+                <a:latin typeface="Microsoft YaHei"/>
+                <a:ea typeface="Microsoft YaHei"/>
+                <a:cs typeface="Microsoft YaHei"/>
+              </a:rPr>
+              <a:t>P2</a:t>
+            </a:r>
+          </a:p>
+        </p:txBody>
+      </p:sp>
+      <p:sp>
+        <p:nvSpPr>
+          <p:cNvPr id="18" name="需求-社会规范可视化"/>
+          <p:cNvSpPr/>
+          <p:nvPr/>
+        </p:nvSpPr>
+        <p:spPr>
+          <a:xfrm>
+            <a:off x="5883490" y="2957345"/>
+            <a:ext cx="1765527" cy="771490"/>
+          </a:xfrm>
+          <a:prstGeom prst="roundRect">
+            <a:avLst>
+              <a:gd name="adj" fmla="val 9615"/>
+            </a:avLst>
+          </a:prstGeom>
+          <a:solidFill>
+            <a:srgbClr val="FCFBF7"/>
+          </a:solidFill>
+          <a:ln w="10385">
+            <a:solidFill>
+              <a:srgbClr val="A6B2B9"/>
+            </a:solidFill>
+          </a:ln>
+          <a:effectLst/>
+        </p:spPr>
+        <p:txBody>
+          <a:bodyPr rtlCol="0" anchor="ctr"/>
+          <a:lstStyle/>
+          <a:p>
+            <a:pPr algn="ctr"/>
+          </a:p>
+        </p:txBody>
+      </p:sp>
+      <p:sp>
+        <p:nvSpPr>
+          <p:cNvPr id="19" name="TextBox 18"/>
+          <p:cNvSpPr txBox="1"/>
+          <p:nvPr/>
+        </p:nvSpPr>
+        <p:spPr>
+          <a:xfrm>
+            <a:off x="6129774" y="3105709"/>
+            <a:ext cx="1272960" cy="281890"/>
+          </a:xfrm>
+          <a:prstGeom prst="rect">
+            <a:avLst/>
+          </a:prstGeom>
+          <a:noFill/>
+        </p:spPr>
+        <p:txBody>
+          <a:bodyPr wrap="none" lIns="0" rIns="0" tIns="0" bIns="0" anchor="ctr">
+            <a:spAutoFit/>
+          </a:bodyPr>
+          <a:lstStyle/>
+          <a:p>
+            <a:pPr algn="ctr">
+              <a:lnSpc>
+                <a:spcPct val="128000"/>
+              </a:lnSpc>
+            </a:pPr>
+            <a:r>
+              <a:rPr sz="1168" b="1">
+                <a:solidFill>
+                  <a:srgbClr val="31332C"/>
+                </a:solidFill>
+                <a:latin typeface="Microsoft YaHei"/>
+                <a:ea typeface="Microsoft YaHei"/>
+                <a:cs typeface="Microsoft YaHei"/>
+              </a:rPr>
+              <a:t>社会规范可视化</a:t>
+            </a:r>
+          </a:p>
+        </p:txBody>
+      </p:sp>
+      <p:sp>
+        <p:nvSpPr>
+          <p:cNvPr id="20" name="Rounded Rectangle 19"/>
+          <p:cNvSpPr/>
+          <p:nvPr/>
+        </p:nvSpPr>
+        <p:spPr>
+          <a:xfrm>
+            <a:off x="6588218" y="3402436"/>
+            <a:ext cx="356072" cy="178036"/>
+          </a:xfrm>
+          <a:prstGeom prst="roundRect">
+            <a:avLst>
+              <a:gd name="adj" fmla="val 50000"/>
+            </a:avLst>
+          </a:prstGeom>
+          <a:solidFill>
+            <a:srgbClr val="DFE5E8"/>
+          </a:solidFill>
+          <a:ln>
+            <a:noFill/>
+          </a:ln>
+          <a:effectLst/>
+        </p:spPr>
+        <p:txBody>
+          <a:bodyPr rtlCol="0" anchor="ctr" wrap="none" lIns="0" rIns="0" tIns="0" bIns="0"/>
+          <a:lstStyle/>
+          <a:p>
+            <a:pPr algn="ctr">
+              <a:lnSpc>
+                <a:spcPct val="128000"/>
+              </a:lnSpc>
+            </a:pPr>
+            <a:r>
+              <a:rPr sz="759" b="1">
+                <a:solidFill>
+                  <a:srgbClr val="A6B2B9"/>
+                </a:solidFill>
+                <a:latin typeface="Microsoft YaHei"/>
+                <a:ea typeface="Microsoft YaHei"/>
+                <a:cs typeface="Microsoft YaHei"/>
+              </a:rPr>
+              <a:t>P2</a:t>
+            </a:r>
+          </a:p>
+        </p:txBody>
+      </p:sp>
+      <p:sp>
+        <p:nvSpPr>
+          <p:cNvPr id="21" name="需求-听觉辅助提示"/>
+          <p:cNvSpPr/>
+          <p:nvPr/>
+        </p:nvSpPr>
+        <p:spPr>
+          <a:xfrm>
+            <a:off x="7827054" y="2957345"/>
+            <a:ext cx="1765527" cy="771490"/>
+          </a:xfrm>
+          <a:prstGeom prst="roundRect">
+            <a:avLst>
+              <a:gd name="adj" fmla="val 9615"/>
+            </a:avLst>
+          </a:prstGeom>
+          <a:solidFill>
+            <a:srgbClr val="FCFBF7"/>
+          </a:solidFill>
+          <a:ln w="10385">
+            <a:solidFill>
+              <a:srgbClr val="A6B2B9"/>
+            </a:solidFill>
+          </a:ln>
+          <a:effectLst/>
+        </p:spPr>
+        <p:txBody>
+          <a:bodyPr rtlCol="0" anchor="ctr"/>
+          <a:lstStyle/>
+          <a:p>
+            <a:pPr algn="ctr"/>
+          </a:p>
+        </p:txBody>
+      </p:sp>
+      <p:sp>
+        <p:nvSpPr>
+          <p:cNvPr id="22" name="TextBox 21"/>
+          <p:cNvSpPr txBox="1"/>
+          <p:nvPr/>
+        </p:nvSpPr>
+        <p:spPr>
+          <a:xfrm>
+            <a:off x="8157905" y="3105709"/>
+            <a:ext cx="1103825" cy="281890"/>
+          </a:xfrm>
+          <a:prstGeom prst="rect">
+            <a:avLst/>
+          </a:prstGeom>
+          <a:noFill/>
+        </p:spPr>
+        <p:txBody>
+          <a:bodyPr wrap="none" lIns="0" rIns="0" tIns="0" bIns="0" anchor="ctr">
+            <a:spAutoFit/>
+          </a:bodyPr>
+          <a:lstStyle/>
+          <a:p>
+            <a:pPr algn="ctr">
+              <a:lnSpc>
+                <a:spcPct val="128000"/>
+              </a:lnSpc>
+            </a:pPr>
+            <a:r>
+              <a:rPr sz="1168" b="1">
+                <a:solidFill>
+                  <a:srgbClr val="31332C"/>
+                </a:solidFill>
+                <a:latin typeface="Microsoft YaHei"/>
+                <a:ea typeface="Microsoft YaHei"/>
+                <a:cs typeface="Microsoft YaHei"/>
+              </a:rPr>
+              <a:t>听觉辅助提示</a:t>
+            </a:r>
+          </a:p>
+        </p:txBody>
+      </p:sp>
+      <p:sp>
+        <p:nvSpPr>
+          <p:cNvPr id="23" name="Rounded Rectangle 22"/>
+          <p:cNvSpPr/>
+          <p:nvPr/>
+        </p:nvSpPr>
+        <p:spPr>
+          <a:xfrm>
+            <a:off x="8531781" y="3402436"/>
+            <a:ext cx="356072" cy="178036"/>
+          </a:xfrm>
+          <a:prstGeom prst="roundRect">
+            <a:avLst>
+              <a:gd name="adj" fmla="val 50000"/>
+            </a:avLst>
+          </a:prstGeom>
+          <a:solidFill>
+            <a:srgbClr val="DFE5E8"/>
+          </a:solidFill>
+          <a:ln>
+            <a:noFill/>
+          </a:ln>
+          <a:effectLst/>
+        </p:spPr>
+        <p:txBody>
+          <a:bodyPr rtlCol="0" anchor="ctr" wrap="none" lIns="0" rIns="0" tIns="0" bIns="0"/>
+          <a:lstStyle/>
+          <a:p>
+            <a:pPr algn="ctr">
+              <a:lnSpc>
+                <a:spcPct val="128000"/>
+              </a:lnSpc>
+            </a:pPr>
+            <a:r>
+              <a:rPr sz="759" b="1">
+                <a:solidFill>
+                  <a:srgbClr val="A6B2B9"/>
+                </a:solidFill>
+                <a:latin typeface="Microsoft YaHei"/>
+                <a:ea typeface="Microsoft YaHei"/>
+                <a:cs typeface="Microsoft YaHei"/>
+              </a:rPr>
+              <a:t>P2</a:t>
+            </a:r>
+          </a:p>
+        </p:txBody>
+      </p:sp>
+      <p:sp>
+        <p:nvSpPr>
+          <p:cNvPr id="24" name="需求-情感化设计元素"/>
+          <p:cNvSpPr/>
+          <p:nvPr/>
+        </p:nvSpPr>
+        <p:spPr>
+          <a:xfrm>
+            <a:off x="9770618" y="2957345"/>
+            <a:ext cx="1765527" cy="771490"/>
+          </a:xfrm>
+          <a:prstGeom prst="roundRect">
+            <a:avLst>
+              <a:gd name="adj" fmla="val 9615"/>
+            </a:avLst>
+          </a:prstGeom>
+          <a:solidFill>
+            <a:srgbClr val="FCFBF7"/>
+          </a:solidFill>
+          <a:ln w="10385">
+            <a:solidFill>
+              <a:srgbClr val="A6B2B9"/>
+            </a:solidFill>
+          </a:ln>
+          <a:effectLst/>
+        </p:spPr>
+        <p:txBody>
+          <a:bodyPr rtlCol="0" anchor="ctr"/>
+          <a:lstStyle/>
+          <a:p>
+            <a:pPr algn="ctr"/>
+          </a:p>
+        </p:txBody>
+      </p:sp>
+      <p:sp>
+        <p:nvSpPr>
+          <p:cNvPr id="25" name="TextBox 24"/>
+          <p:cNvSpPr txBox="1"/>
+          <p:nvPr/>
+        </p:nvSpPr>
+        <p:spPr>
+          <a:xfrm>
+            <a:off x="10016901" y="3105709"/>
+            <a:ext cx="1272960" cy="281890"/>
+          </a:xfrm>
+          <a:prstGeom prst="rect">
+            <a:avLst/>
+          </a:prstGeom>
+          <a:noFill/>
+        </p:spPr>
+        <p:txBody>
+          <a:bodyPr wrap="none" lIns="0" rIns="0" tIns="0" bIns="0" anchor="ctr">
+            <a:spAutoFit/>
+          </a:bodyPr>
+          <a:lstStyle/>
+          <a:p>
+            <a:pPr algn="ctr">
+              <a:lnSpc>
+                <a:spcPct val="128000"/>
+              </a:lnSpc>
+            </a:pPr>
+            <a:r>
+              <a:rPr sz="1168" b="1">
+                <a:solidFill>
+                  <a:srgbClr val="31332C"/>
+                </a:solidFill>
+                <a:latin typeface="Microsoft YaHei"/>
+                <a:ea typeface="Microsoft YaHei"/>
+                <a:cs typeface="Microsoft YaHei"/>
+              </a:rPr>
+              <a:t>情感化设计元素</a:t>
+            </a:r>
+          </a:p>
+        </p:txBody>
+      </p:sp>
+      <p:sp>
+        <p:nvSpPr>
+          <p:cNvPr id="26" name="Rounded Rectangle 25"/>
+          <p:cNvSpPr/>
+          <p:nvPr/>
+        </p:nvSpPr>
+        <p:spPr>
+          <a:xfrm>
+            <a:off x="10475345" y="3402436"/>
+            <a:ext cx="356072" cy="178036"/>
+          </a:xfrm>
+          <a:prstGeom prst="roundRect">
+            <a:avLst>
+              <a:gd name="adj" fmla="val 50000"/>
+            </a:avLst>
+          </a:prstGeom>
+          <a:solidFill>
+            <a:srgbClr val="DFE5E8"/>
+          </a:solidFill>
+          <a:ln>
+            <a:noFill/>
+          </a:ln>
+          <a:effectLst/>
+        </p:spPr>
+        <p:txBody>
+          <a:bodyPr rtlCol="0" anchor="ctr" wrap="none" lIns="0" rIns="0" tIns="0" bIns="0"/>
+          <a:lstStyle/>
+          <a:p>
+            <a:pPr algn="ctr">
+              <a:lnSpc>
+                <a:spcPct val="128000"/>
+              </a:lnSpc>
+            </a:pPr>
+            <a:r>
+              <a:rPr sz="759" b="1">
+                <a:solidFill>
+                  <a:srgbClr val="A6B2B9"/>
+                </a:solidFill>
+                <a:latin typeface="Microsoft YaHei"/>
+                <a:ea typeface="Microsoft YaHei"/>
+                <a:cs typeface="Microsoft YaHei"/>
+              </a:rPr>
+              <a:t>P2</a:t>
+            </a:r>
+          </a:p>
+        </p:txBody>
+      </p:sp>
+      <p:sp>
+        <p:nvSpPr>
+          <p:cNvPr id="27" name="需求-景观融合设计"/>
+          <p:cNvSpPr/>
+          <p:nvPr/>
+        </p:nvSpPr>
+        <p:spPr>
+          <a:xfrm>
+            <a:off x="11714181" y="2957345"/>
+            <a:ext cx="1765527" cy="771490"/>
+          </a:xfrm>
+          <a:prstGeom prst="roundRect">
+            <a:avLst>
+              <a:gd name="adj" fmla="val 9615"/>
+            </a:avLst>
+          </a:prstGeom>
+          <a:solidFill>
+            <a:srgbClr val="FCFBF7"/>
+          </a:solidFill>
+          <a:ln w="10385">
+            <a:solidFill>
+              <a:srgbClr val="A6B2B9"/>
+            </a:solidFill>
+          </a:ln>
+          <a:effectLst/>
+        </p:spPr>
+        <p:txBody>
+          <a:bodyPr rtlCol="0" anchor="ctr"/>
+          <a:lstStyle/>
+          <a:p>
+            <a:pPr algn="ctr"/>
+          </a:p>
+        </p:txBody>
+      </p:sp>
+      <p:sp>
+        <p:nvSpPr>
+          <p:cNvPr id="28" name="TextBox 27"/>
+          <p:cNvSpPr txBox="1"/>
+          <p:nvPr/>
+        </p:nvSpPr>
+        <p:spPr>
+          <a:xfrm>
+            <a:off x="12045032" y="3105709"/>
+            <a:ext cx="1103825" cy="281890"/>
+          </a:xfrm>
+          <a:prstGeom prst="rect">
+            <a:avLst/>
+          </a:prstGeom>
+          <a:noFill/>
+        </p:spPr>
+        <p:txBody>
+          <a:bodyPr wrap="none" lIns="0" rIns="0" tIns="0" bIns="0" anchor="ctr">
+            <a:spAutoFit/>
+          </a:bodyPr>
+          <a:lstStyle/>
+          <a:p>
+            <a:pPr algn="ctr">
+              <a:lnSpc>
+                <a:spcPct val="128000"/>
+              </a:lnSpc>
+            </a:pPr>
+            <a:r>
+              <a:rPr sz="1168" b="1">
+                <a:solidFill>
+                  <a:srgbClr val="31332C"/>
+                </a:solidFill>
+                <a:latin typeface="Microsoft YaHei"/>
+                <a:ea typeface="Microsoft YaHei"/>
+                <a:cs typeface="Microsoft YaHei"/>
+              </a:rPr>
+              <a:t>景观融合设计</a:t>
+            </a:r>
+          </a:p>
+        </p:txBody>
+      </p:sp>
+      <p:sp>
+        <p:nvSpPr>
+          <p:cNvPr id="29" name="Rounded Rectangle 28"/>
+          <p:cNvSpPr/>
+          <p:nvPr/>
+        </p:nvSpPr>
+        <p:spPr>
+          <a:xfrm>
+            <a:off x="12418909" y="3402436"/>
+            <a:ext cx="356072" cy="178036"/>
+          </a:xfrm>
+          <a:prstGeom prst="roundRect">
+            <a:avLst>
+              <a:gd name="adj" fmla="val 50000"/>
+            </a:avLst>
+          </a:prstGeom>
+          <a:solidFill>
+            <a:srgbClr val="DFE5E8"/>
+          </a:solidFill>
+          <a:ln>
+            <a:noFill/>
+          </a:ln>
+          <a:effectLst/>
+        </p:spPr>
+        <p:txBody>
+          <a:bodyPr rtlCol="0" anchor="ctr" wrap="none" lIns="0" rIns="0" tIns="0" bIns="0"/>
+          <a:lstStyle/>
+          <a:p>
+            <a:pPr algn="ctr">
+              <a:lnSpc>
+                <a:spcPct val="128000"/>
+              </a:lnSpc>
+            </a:pPr>
+            <a:r>
+              <a:rPr sz="759" b="1">
+                <a:solidFill>
+                  <a:srgbClr val="A6B2B9"/>
+                </a:solidFill>
+                <a:latin typeface="Microsoft YaHei"/>
+                <a:ea typeface="Microsoft YaHei"/>
+                <a:cs typeface="Microsoft YaHei"/>
+              </a:rPr>
+              <a:t>P3</a:t>
+            </a:r>
+          </a:p>
+        </p:txBody>
+      </p:sp>
+      <p:sp>
+        <p:nvSpPr>
+          <p:cNvPr id="30" name="需求带-期望需求"/>
+          <p:cNvSpPr/>
+          <p:nvPr/>
+        </p:nvSpPr>
+        <p:spPr>
+          <a:xfrm>
+            <a:off x="705600" y="4351963"/>
+            <a:ext cx="12966981" cy="1631999"/>
+          </a:xfrm>
+          <a:prstGeom prst="roundRect">
+            <a:avLst>
+              <a:gd name="adj" fmla="val 5454"/>
+            </a:avLst>
+          </a:prstGeom>
+          <a:solidFill>
+            <a:srgbClr val="D8DFC8">
+              <a:alpha val="45000"/>
+            </a:srgbClr>
+          </a:solidFill>
+          <a:ln>
+            <a:noFill/>
+          </a:ln>
+          <a:effectLst/>
+        </p:spPr>
+        <p:txBody>
+          <a:bodyPr rtlCol="0" anchor="ctr"/>
+          <a:lstStyle/>
+          <a:p>
+            <a:pPr algn="ctr"/>
+          </a:p>
+        </p:txBody>
+      </p:sp>
+      <p:sp>
+        <p:nvSpPr>
+          <p:cNvPr id="31" name="Rounded Rectangle 30"/>
+          <p:cNvSpPr/>
+          <p:nvPr/>
+        </p:nvSpPr>
+        <p:spPr>
+          <a:xfrm>
+            <a:off x="705600" y="4351963"/>
+            <a:ext cx="2967272" cy="1631999"/>
+          </a:xfrm>
+          <a:prstGeom prst="roundRect">
+            <a:avLst>
+              <a:gd name="adj" fmla="val 5454"/>
+            </a:avLst>
+          </a:prstGeom>
+          <a:solidFill>
+            <a:srgbClr val="7A8E63"/>
+          </a:solidFill>
+          <a:ln>
+            <a:noFill/>
+          </a:ln>
+          <a:effectLst/>
+        </p:spPr>
+        <p:txBody>
+          <a:bodyPr rtlCol="0" anchor="ctr"/>
+          <a:lstStyle/>
+          <a:p>
+            <a:pPr algn="ctr"/>
+          </a:p>
+        </p:txBody>
+      </p:sp>
+      <p:sp>
+        <p:nvSpPr>
+          <p:cNvPr id="32" name="Rectangle 31"/>
+          <p:cNvSpPr/>
+          <p:nvPr/>
+        </p:nvSpPr>
+        <p:spPr>
+          <a:xfrm>
+            <a:off x="2782690" y="4351963"/>
+            <a:ext cx="1379781" cy="1631999"/>
+          </a:xfrm>
+          <a:prstGeom prst="rect">
+            <a:avLst/>
+          </a:prstGeom>
+          <a:solidFill>
+            <a:srgbClr val="7A8E63"/>
+          </a:solidFill>
+          <a:ln>
+            <a:noFill/>
+          </a:ln>
+          <a:effectLst/>
+        </p:spPr>
+        <p:txBody>
+          <a:bodyPr rtlCol="0" anchor="ctr"/>
+          <a:lstStyle/>
+          <a:p>
+            <a:pPr algn="ctr"/>
+          </a:p>
+        </p:txBody>
+      </p:sp>
+      <p:sp>
+        <p:nvSpPr>
+          <p:cNvPr id="33" name="TextBox 32"/>
+          <p:cNvSpPr txBox="1"/>
+          <p:nvPr/>
+        </p:nvSpPr>
+        <p:spPr>
+          <a:xfrm>
+            <a:off x="913309" y="4531483"/>
+            <a:ext cx="995223" cy="366458"/>
+          </a:xfrm>
+          <a:prstGeom prst="rect">
+            <a:avLst/>
+          </a:prstGeom>
+          <a:noFill/>
+        </p:spPr>
+        <p:txBody>
+          <a:bodyPr wrap="none" lIns="0" rIns="0" tIns="0" bIns="0" anchor="ctr">
+            <a:spAutoFit/>
+          </a:bodyPr>
+          <a:lstStyle/>
+          <a:p>
+            <a:pPr algn="l">
+              <a:lnSpc>
+                <a:spcPct val="128000"/>
+              </a:lnSpc>
+            </a:pPr>
+            <a:r>
+              <a:rPr sz="1518" b="1">
+                <a:solidFill>
+                  <a:srgbClr val="FFFFFF"/>
+                </a:solidFill>
+                <a:latin typeface="Microsoft YaHei"/>
+                <a:ea typeface="Microsoft YaHei"/>
+                <a:cs typeface="Microsoft YaHei"/>
+              </a:rPr>
+              <a:t>期望需求</a:t>
+            </a:r>
+          </a:p>
+        </p:txBody>
+      </p:sp>
+      <p:sp>
+        <p:nvSpPr>
+          <p:cNvPr id="34" name="TextBox 33"/>
+          <p:cNvSpPr txBox="1"/>
+          <p:nvPr/>
+        </p:nvSpPr>
+        <p:spPr>
+          <a:xfrm>
+            <a:off x="1803490" y="4632370"/>
+            <a:ext cx="1039064" cy="197323"/>
+          </a:xfrm>
+          <a:prstGeom prst="rect">
+            <a:avLst/>
+          </a:prstGeom>
+          <a:noFill/>
+        </p:spPr>
+        <p:txBody>
+          <a:bodyPr wrap="none" lIns="0" rIns="0" tIns="0" bIns="0" anchor="ctr">
+            <a:spAutoFit/>
+          </a:bodyPr>
+          <a:lstStyle/>
+          <a:p>
+            <a:pPr algn="l">
+              <a:lnSpc>
+                <a:spcPct val="128000"/>
+              </a:lnSpc>
+            </a:pPr>
+            <a:r>
+              <a:rPr sz="817" b="0">
+                <a:solidFill>
+                  <a:srgbClr val="FFFFFF">
+                    <a:alpha val="78000"/>
+                  </a:srgbClr>
+                </a:solidFill>
+                <a:latin typeface="Microsoft YaHei"/>
+                <a:ea typeface="Microsoft YaHei"/>
+                <a:cs typeface="Microsoft YaHei"/>
+              </a:rPr>
+              <a:t>One-dimensional</a:t>
+            </a:r>
+          </a:p>
+        </p:txBody>
+      </p:sp>
+      <p:sp>
+        <p:nvSpPr>
+          <p:cNvPr id="35" name="Rounded Rectangle 34"/>
+          <p:cNvSpPr/>
+          <p:nvPr/>
+        </p:nvSpPr>
+        <p:spPr>
+          <a:xfrm>
+            <a:off x="913309" y="4930581"/>
+            <a:ext cx="771490" cy="222545"/>
+          </a:xfrm>
+          <a:prstGeom prst="roundRect">
+            <a:avLst>
+              <a:gd name="adj" fmla="val 50000"/>
+            </a:avLst>
+          </a:prstGeom>
+          <a:solidFill>
+            <a:srgbClr val="FFFFFF">
+              <a:alpha val="24000"/>
+            </a:srgbClr>
+          </a:solidFill>
+          <a:ln>
+            <a:noFill/>
+          </a:ln>
+          <a:effectLst/>
+        </p:spPr>
+        <p:txBody>
+          <a:bodyPr rtlCol="0" anchor="ctr" wrap="none" lIns="0" rIns="0" tIns="0" bIns="0"/>
+          <a:lstStyle/>
+          <a:p>
+            <a:pPr algn="ctr">
+              <a:lnSpc>
+                <a:spcPct val="128000"/>
+              </a:lnSpc>
+            </a:pPr>
+            <a:r>
+              <a:rPr sz="846" b="1">
+                <a:solidFill>
+                  <a:srgbClr val="FFFFFF"/>
+                </a:solidFill>
+                <a:latin typeface="Microsoft YaHei"/>
+                <a:ea typeface="Microsoft YaHei"/>
+                <a:cs typeface="Microsoft YaHei"/>
+              </a:rPr>
+              <a:t>P1   5 项</a:t>
+            </a:r>
+          </a:p>
+        </p:txBody>
+      </p:sp>
+      <p:sp>
+        <p:nvSpPr>
+          <p:cNvPr id="36" name="TextBox 35"/>
+          <p:cNvSpPr txBox="1"/>
+          <p:nvPr/>
+        </p:nvSpPr>
+        <p:spPr>
+          <a:xfrm>
+            <a:off x="913309" y="5304829"/>
+            <a:ext cx="1544242" cy="190276"/>
+          </a:xfrm>
+          <a:prstGeom prst="rect">
+            <a:avLst/>
+          </a:prstGeom>
+          <a:noFill/>
+        </p:spPr>
+        <p:txBody>
+          <a:bodyPr wrap="none" lIns="0" rIns="0" tIns="0" bIns="0" anchor="ctr">
+            <a:spAutoFit/>
+          </a:bodyPr>
+          <a:lstStyle/>
+          <a:p>
+            <a:pPr algn="l">
+              <a:lnSpc>
+                <a:spcPct val="128000"/>
+              </a:lnSpc>
+            </a:pPr>
+            <a:r>
+              <a:rPr sz="788" b="0">
+                <a:solidFill>
+                  <a:srgbClr val="FFFFFF">
+                    <a:alpha val="88000"/>
+                  </a:srgbClr>
+                </a:solidFill>
+                <a:latin typeface="Microsoft YaHei"/>
+                <a:ea typeface="Microsoft YaHei"/>
+                <a:cs typeface="Microsoft YaHei"/>
+              </a:rPr>
+              <a:t>呈线性效应，实现程度越高，</a:t>
+            </a:r>
+          </a:p>
+        </p:txBody>
+      </p:sp>
+      <p:sp>
+        <p:nvSpPr>
+          <p:cNvPr id="37" name="TextBox 36"/>
+          <p:cNvSpPr txBox="1"/>
+          <p:nvPr/>
+        </p:nvSpPr>
+        <p:spPr>
+          <a:xfrm>
+            <a:off x="913309" y="5482865"/>
+            <a:ext cx="973413" cy="190276"/>
+          </a:xfrm>
+          <a:prstGeom prst="rect">
+            <a:avLst/>
+          </a:prstGeom>
+          <a:noFill/>
+        </p:spPr>
+        <p:txBody>
+          <a:bodyPr wrap="none" lIns="0" rIns="0" tIns="0" bIns="0" anchor="ctr">
+            <a:spAutoFit/>
+          </a:bodyPr>
+          <a:lstStyle/>
+          <a:p>
+            <a:pPr algn="l">
+              <a:lnSpc>
+                <a:spcPct val="128000"/>
+              </a:lnSpc>
+            </a:pPr>
+            <a:r>
+              <a:rPr sz="788" b="0">
+                <a:solidFill>
+                  <a:srgbClr val="FFFFFF">
+                    <a:alpha val="88000"/>
+                  </a:srgbClr>
+                </a:solidFill>
+                <a:latin typeface="Microsoft YaHei"/>
+                <a:ea typeface="Microsoft YaHei"/>
+                <a:cs typeface="Microsoft YaHei"/>
+              </a:rPr>
+              <a:t>满意度提升越明显</a:t>
+            </a:r>
+          </a:p>
+        </p:txBody>
+      </p:sp>
+      <p:sp>
+        <p:nvSpPr>
+          <p:cNvPr id="38" name="需求-盲区提示"/>
+          <p:cNvSpPr/>
+          <p:nvPr/>
+        </p:nvSpPr>
+        <p:spPr>
+          <a:xfrm>
+            <a:off x="3939927" y="4782218"/>
+            <a:ext cx="1765527" cy="771490"/>
+          </a:xfrm>
+          <a:prstGeom prst="roundRect">
+            <a:avLst>
+              <a:gd name="adj" fmla="val 9615"/>
+            </a:avLst>
+          </a:prstGeom>
+          <a:solidFill>
+            <a:srgbClr val="FCFBF7"/>
+          </a:solidFill>
+          <a:ln w="10385">
+            <a:solidFill>
+              <a:srgbClr val="97A97F"/>
+            </a:solidFill>
+          </a:ln>
+          <a:effectLst/>
+        </p:spPr>
+        <p:txBody>
+          <a:bodyPr rtlCol="0" anchor="ctr"/>
+          <a:lstStyle/>
+          <a:p>
+            <a:pPr algn="ctr"/>
+          </a:p>
+        </p:txBody>
+      </p:sp>
+      <p:sp>
+        <p:nvSpPr>
+          <p:cNvPr id="39" name="TextBox 38"/>
+          <p:cNvSpPr txBox="1"/>
+          <p:nvPr/>
+        </p:nvSpPr>
+        <p:spPr>
+          <a:xfrm>
+            <a:off x="4439912" y="4930581"/>
+            <a:ext cx="765556" cy="281890"/>
+          </a:xfrm>
+          <a:prstGeom prst="rect">
+            <a:avLst/>
+          </a:prstGeom>
+          <a:noFill/>
+        </p:spPr>
+        <p:txBody>
+          <a:bodyPr wrap="none" lIns="0" rIns="0" tIns="0" bIns="0" anchor="ctr">
+            <a:spAutoFit/>
+          </a:bodyPr>
+          <a:lstStyle/>
+          <a:p>
+            <a:pPr algn="ctr">
+              <a:lnSpc>
+                <a:spcPct val="128000"/>
+              </a:lnSpc>
+            </a:pPr>
+            <a:r>
+              <a:rPr sz="1168" b="1">
+                <a:solidFill>
+                  <a:srgbClr val="31332C"/>
+                </a:solidFill>
+                <a:latin typeface="Microsoft YaHei"/>
+                <a:ea typeface="Microsoft YaHei"/>
+                <a:cs typeface="Microsoft YaHei"/>
+              </a:rPr>
+              <a:t>盲区提示</a:t>
+            </a:r>
+          </a:p>
+        </p:txBody>
+      </p:sp>
+      <p:sp>
+        <p:nvSpPr>
+          <p:cNvPr id="40" name="Rounded Rectangle 39"/>
+          <p:cNvSpPr/>
+          <p:nvPr/>
+        </p:nvSpPr>
+        <p:spPr>
+          <a:xfrm>
+            <a:off x="4644654" y="5227309"/>
+            <a:ext cx="356072" cy="178036"/>
+          </a:xfrm>
+          <a:prstGeom prst="roundRect">
+            <a:avLst>
+              <a:gd name="adj" fmla="val 50000"/>
+            </a:avLst>
+          </a:prstGeom>
+          <a:solidFill>
+            <a:srgbClr val="D8DFC8"/>
+          </a:solidFill>
+          <a:ln>
+            <a:noFill/>
+          </a:ln>
+          <a:effectLst/>
+        </p:spPr>
+        <p:txBody>
+          <a:bodyPr rtlCol="0" anchor="ctr" wrap="none" lIns="0" rIns="0" tIns="0" bIns="0"/>
+          <a:lstStyle/>
+          <a:p>
+            <a:pPr algn="ctr">
+              <a:lnSpc>
+                <a:spcPct val="128000"/>
+              </a:lnSpc>
+            </a:pPr>
+            <a:r>
+              <a:rPr sz="759" b="1">
+                <a:solidFill>
+                  <a:srgbClr val="7A8E63"/>
+                </a:solidFill>
+                <a:latin typeface="Microsoft YaHei"/>
+                <a:ea typeface="Microsoft YaHei"/>
+                <a:cs typeface="Microsoft YaHei"/>
+              </a:rPr>
+              <a:t>P1</a:t>
+            </a:r>
+          </a:p>
+        </p:txBody>
+      </p:sp>
+      <p:sp>
+        <p:nvSpPr>
+          <p:cNvPr id="41" name="需求-速度警示"/>
+          <p:cNvSpPr/>
+          <p:nvPr/>
+        </p:nvSpPr>
+        <p:spPr>
+          <a:xfrm>
+            <a:off x="5883490" y="4782218"/>
+            <a:ext cx="1765527" cy="771490"/>
+          </a:xfrm>
+          <a:prstGeom prst="roundRect">
+            <a:avLst>
+              <a:gd name="adj" fmla="val 9615"/>
+            </a:avLst>
+          </a:prstGeom>
+          <a:solidFill>
+            <a:srgbClr val="FCFBF7"/>
+          </a:solidFill>
+          <a:ln w="10385">
+            <a:solidFill>
+              <a:srgbClr val="97A97F"/>
+            </a:solidFill>
+          </a:ln>
+          <a:effectLst/>
+        </p:spPr>
+        <p:txBody>
+          <a:bodyPr rtlCol="0" anchor="ctr"/>
+          <a:lstStyle/>
+          <a:p>
+            <a:pPr algn="ctr"/>
+          </a:p>
+        </p:txBody>
+      </p:sp>
+      <p:sp>
+        <p:nvSpPr>
+          <p:cNvPr id="42" name="TextBox 41"/>
+          <p:cNvSpPr txBox="1"/>
+          <p:nvPr/>
+        </p:nvSpPr>
+        <p:spPr>
+          <a:xfrm>
+            <a:off x="6383476" y="4930581"/>
+            <a:ext cx="765556" cy="281890"/>
+          </a:xfrm>
+          <a:prstGeom prst="rect">
+            <a:avLst/>
+          </a:prstGeom>
+          <a:noFill/>
+        </p:spPr>
+        <p:txBody>
+          <a:bodyPr wrap="none" lIns="0" rIns="0" tIns="0" bIns="0" anchor="ctr">
+            <a:spAutoFit/>
+          </a:bodyPr>
+          <a:lstStyle/>
+          <a:p>
+            <a:pPr algn="ctr">
+              <a:lnSpc>
+                <a:spcPct val="128000"/>
+              </a:lnSpc>
+            </a:pPr>
+            <a:r>
+              <a:rPr sz="1168" b="1">
+                <a:solidFill>
+                  <a:srgbClr val="31332C"/>
+                </a:solidFill>
+                <a:latin typeface="Microsoft YaHei"/>
+                <a:ea typeface="Microsoft YaHei"/>
+                <a:cs typeface="Microsoft YaHei"/>
+              </a:rPr>
+              <a:t>速度警示</a:t>
+            </a:r>
+          </a:p>
+        </p:txBody>
+      </p:sp>
+      <p:sp>
+        <p:nvSpPr>
+          <p:cNvPr id="43" name="Rounded Rectangle 42"/>
+          <p:cNvSpPr/>
+          <p:nvPr/>
+        </p:nvSpPr>
+        <p:spPr>
+          <a:xfrm>
+            <a:off x="6588218" y="5227309"/>
+            <a:ext cx="356072" cy="178036"/>
+          </a:xfrm>
+          <a:prstGeom prst="roundRect">
+            <a:avLst>
+              <a:gd name="adj" fmla="val 50000"/>
+            </a:avLst>
+          </a:prstGeom>
+          <a:solidFill>
+            <a:srgbClr val="D8DFC8"/>
+          </a:solidFill>
+          <a:ln>
+            <a:noFill/>
+          </a:ln>
+          <a:effectLst/>
+        </p:spPr>
+        <p:txBody>
+          <a:bodyPr rtlCol="0" anchor="ctr" wrap="none" lIns="0" rIns="0" tIns="0" bIns="0"/>
+          <a:lstStyle/>
+          <a:p>
+            <a:pPr algn="ctr">
+              <a:lnSpc>
+                <a:spcPct val="128000"/>
+              </a:lnSpc>
+            </a:pPr>
+            <a:r>
+              <a:rPr sz="759" b="1">
+                <a:solidFill>
+                  <a:srgbClr val="7A8E63"/>
+                </a:solidFill>
+                <a:latin typeface="Microsoft YaHei"/>
+                <a:ea typeface="Microsoft YaHei"/>
+                <a:cs typeface="Microsoft YaHei"/>
+              </a:rPr>
+              <a:t>P1</a:t>
+            </a:r>
+          </a:p>
+        </p:txBody>
+      </p:sp>
+      <p:sp>
+        <p:nvSpPr>
+          <p:cNvPr id="44" name="需求-推荐速度提示"/>
+          <p:cNvSpPr/>
+          <p:nvPr/>
+        </p:nvSpPr>
+        <p:spPr>
+          <a:xfrm>
+            <a:off x="7827054" y="4782218"/>
+            <a:ext cx="1765527" cy="771490"/>
+          </a:xfrm>
+          <a:prstGeom prst="roundRect">
+            <a:avLst>
+              <a:gd name="adj" fmla="val 9615"/>
+            </a:avLst>
+          </a:prstGeom>
+          <a:solidFill>
+            <a:srgbClr val="FCFBF7"/>
+          </a:solidFill>
+          <a:ln w="10385">
+            <a:solidFill>
+              <a:srgbClr val="97A97F"/>
+            </a:solidFill>
+          </a:ln>
+          <a:effectLst/>
+        </p:spPr>
+        <p:txBody>
+          <a:bodyPr rtlCol="0" anchor="ctr"/>
+          <a:lstStyle/>
+          <a:p>
+            <a:pPr algn="ctr"/>
+          </a:p>
+        </p:txBody>
+      </p:sp>
+      <p:sp>
+        <p:nvSpPr>
+          <p:cNvPr id="45" name="TextBox 44"/>
+          <p:cNvSpPr txBox="1"/>
+          <p:nvPr/>
+        </p:nvSpPr>
+        <p:spPr>
+          <a:xfrm>
+            <a:off x="8157905" y="4930581"/>
+            <a:ext cx="1103825" cy="281890"/>
+          </a:xfrm>
+          <a:prstGeom prst="rect">
+            <a:avLst/>
+          </a:prstGeom>
+          <a:noFill/>
+        </p:spPr>
+        <p:txBody>
+          <a:bodyPr wrap="none" lIns="0" rIns="0" tIns="0" bIns="0" anchor="ctr">
+            <a:spAutoFit/>
+          </a:bodyPr>
+          <a:lstStyle/>
+          <a:p>
+            <a:pPr algn="ctr">
+              <a:lnSpc>
+                <a:spcPct val="128000"/>
+              </a:lnSpc>
+            </a:pPr>
+            <a:r>
+              <a:rPr sz="1168" b="1">
+                <a:solidFill>
+                  <a:srgbClr val="31332C"/>
+                </a:solidFill>
+                <a:latin typeface="Microsoft YaHei"/>
+                <a:ea typeface="Microsoft YaHei"/>
+                <a:cs typeface="Microsoft YaHei"/>
+              </a:rPr>
+              <a:t>推荐速度提示</a:t>
+            </a:r>
+          </a:p>
+        </p:txBody>
+      </p:sp>
+      <p:sp>
+        <p:nvSpPr>
+          <p:cNvPr id="46" name="Rounded Rectangle 45"/>
+          <p:cNvSpPr/>
+          <p:nvPr/>
+        </p:nvSpPr>
+        <p:spPr>
+          <a:xfrm>
+            <a:off x="8531781" y="5227309"/>
+            <a:ext cx="356072" cy="178036"/>
+          </a:xfrm>
+          <a:prstGeom prst="roundRect">
+            <a:avLst>
+              <a:gd name="adj" fmla="val 50000"/>
+            </a:avLst>
+          </a:prstGeom>
+          <a:solidFill>
+            <a:srgbClr val="D8DFC8"/>
+          </a:solidFill>
+          <a:ln>
+            <a:noFill/>
+          </a:ln>
+          <a:effectLst/>
+        </p:spPr>
+        <p:txBody>
+          <a:bodyPr rtlCol="0" anchor="ctr" wrap="none" lIns="0" rIns="0" tIns="0" bIns="0"/>
+          <a:lstStyle/>
+          <a:p>
+            <a:pPr algn="ctr">
+              <a:lnSpc>
+                <a:spcPct val="128000"/>
+              </a:lnSpc>
+            </a:pPr>
+            <a:r>
+              <a:rPr sz="759" b="1">
+                <a:solidFill>
+                  <a:srgbClr val="7A8E63"/>
+                </a:solidFill>
+                <a:latin typeface="Microsoft YaHei"/>
+                <a:ea typeface="Microsoft YaHei"/>
+                <a:cs typeface="Microsoft YaHei"/>
+              </a:rPr>
+              <a:t>P1</a:t>
+            </a:r>
+          </a:p>
+        </p:txBody>
+      </p:sp>
+      <p:sp>
+        <p:nvSpPr>
+          <p:cNvPr id="47" name="需求-安全路径指引"/>
+          <p:cNvSpPr/>
+          <p:nvPr/>
+        </p:nvSpPr>
+        <p:spPr>
+          <a:xfrm>
+            <a:off x="9770618" y="4782218"/>
+            <a:ext cx="1765527" cy="771490"/>
+          </a:xfrm>
+          <a:prstGeom prst="roundRect">
+            <a:avLst>
+              <a:gd name="adj" fmla="val 9615"/>
+            </a:avLst>
+          </a:prstGeom>
+          <a:solidFill>
+            <a:srgbClr val="FCFBF7"/>
+          </a:solidFill>
+          <a:ln w="10385">
+            <a:solidFill>
+              <a:srgbClr val="97A97F"/>
+            </a:solidFill>
+          </a:ln>
+          <a:effectLst/>
+        </p:spPr>
+        <p:txBody>
+          <a:bodyPr rtlCol="0" anchor="ctr"/>
+          <a:lstStyle/>
+          <a:p>
+            <a:pPr algn="ctr"/>
+          </a:p>
+        </p:txBody>
+      </p:sp>
+      <p:sp>
+        <p:nvSpPr>
+          <p:cNvPr id="48" name="TextBox 47"/>
+          <p:cNvSpPr txBox="1"/>
+          <p:nvPr/>
+        </p:nvSpPr>
+        <p:spPr>
+          <a:xfrm>
+            <a:off x="10101469" y="4930581"/>
+            <a:ext cx="1103825" cy="281890"/>
+          </a:xfrm>
+          <a:prstGeom prst="rect">
+            <a:avLst/>
+          </a:prstGeom>
+          <a:noFill/>
+        </p:spPr>
+        <p:txBody>
+          <a:bodyPr wrap="none" lIns="0" rIns="0" tIns="0" bIns="0" anchor="ctr">
+            <a:spAutoFit/>
+          </a:bodyPr>
+          <a:lstStyle/>
+          <a:p>
+            <a:pPr algn="ctr">
+              <a:lnSpc>
+                <a:spcPct val="128000"/>
+              </a:lnSpc>
+            </a:pPr>
+            <a:r>
+              <a:rPr sz="1168" b="1">
+                <a:solidFill>
+                  <a:srgbClr val="31332C"/>
+                </a:solidFill>
+                <a:latin typeface="Microsoft YaHei"/>
+                <a:ea typeface="Microsoft YaHei"/>
+                <a:cs typeface="Microsoft YaHei"/>
+              </a:rPr>
+              <a:t>安全路径指引</a:t>
+            </a:r>
+          </a:p>
+        </p:txBody>
+      </p:sp>
+      <p:sp>
+        <p:nvSpPr>
+          <p:cNvPr id="49" name="Rounded Rectangle 48"/>
+          <p:cNvSpPr/>
+          <p:nvPr/>
+        </p:nvSpPr>
+        <p:spPr>
+          <a:xfrm>
+            <a:off x="10475345" y="5227309"/>
+            <a:ext cx="356072" cy="178036"/>
+          </a:xfrm>
+          <a:prstGeom prst="roundRect">
+            <a:avLst>
+              <a:gd name="adj" fmla="val 50000"/>
+            </a:avLst>
+          </a:prstGeom>
+          <a:solidFill>
+            <a:srgbClr val="D8DFC8"/>
+          </a:solidFill>
+          <a:ln>
+            <a:noFill/>
+          </a:ln>
+          <a:effectLst/>
+        </p:spPr>
+        <p:txBody>
+          <a:bodyPr rtlCol="0" anchor="ctr" wrap="none" lIns="0" rIns="0" tIns="0" bIns="0"/>
+          <a:lstStyle/>
+          <a:p>
+            <a:pPr algn="ctr">
+              <a:lnSpc>
+                <a:spcPct val="128000"/>
+              </a:lnSpc>
+            </a:pPr>
+            <a:r>
+              <a:rPr sz="759" b="1">
+                <a:solidFill>
+                  <a:srgbClr val="7A8E63"/>
+                </a:solidFill>
+                <a:latin typeface="Microsoft YaHei"/>
+                <a:ea typeface="Microsoft YaHei"/>
+                <a:cs typeface="Microsoft YaHei"/>
+              </a:rPr>
+              <a:t>P1</a:t>
+            </a:r>
+          </a:p>
+        </p:txBody>
+      </p:sp>
+      <p:sp>
+        <p:nvSpPr>
+          <p:cNvPr id="50" name="需求-分层信息呈现"/>
+          <p:cNvSpPr/>
+          <p:nvPr/>
+        </p:nvSpPr>
+        <p:spPr>
+          <a:xfrm>
+            <a:off x="11714181" y="4782218"/>
+            <a:ext cx="1765527" cy="771490"/>
+          </a:xfrm>
+          <a:prstGeom prst="roundRect">
+            <a:avLst>
+              <a:gd name="adj" fmla="val 9615"/>
+            </a:avLst>
+          </a:prstGeom>
+          <a:solidFill>
+            <a:srgbClr val="FCFBF7"/>
+          </a:solidFill>
+          <a:ln w="10385">
+            <a:solidFill>
+              <a:srgbClr val="97A97F"/>
+            </a:solidFill>
+          </a:ln>
+          <a:effectLst/>
+        </p:spPr>
+        <p:txBody>
+          <a:bodyPr rtlCol="0" anchor="ctr"/>
+          <a:lstStyle/>
+          <a:p>
+            <a:pPr algn="ctr"/>
+          </a:p>
+        </p:txBody>
+      </p:sp>
+      <p:sp>
+        <p:nvSpPr>
+          <p:cNvPr id="51" name="TextBox 50"/>
+          <p:cNvSpPr txBox="1"/>
+          <p:nvPr/>
+        </p:nvSpPr>
+        <p:spPr>
+          <a:xfrm>
+            <a:off x="12045032" y="4930581"/>
+            <a:ext cx="1103825" cy="281890"/>
+          </a:xfrm>
+          <a:prstGeom prst="rect">
+            <a:avLst/>
+          </a:prstGeom>
+          <a:noFill/>
+        </p:spPr>
+        <p:txBody>
+          <a:bodyPr wrap="none" lIns="0" rIns="0" tIns="0" bIns="0" anchor="ctr">
+            <a:spAutoFit/>
+          </a:bodyPr>
+          <a:lstStyle/>
+          <a:p>
+            <a:pPr algn="ctr">
+              <a:lnSpc>
+                <a:spcPct val="128000"/>
+              </a:lnSpc>
+            </a:pPr>
+            <a:r>
+              <a:rPr sz="1168" b="1">
+                <a:solidFill>
+                  <a:srgbClr val="31332C"/>
+                </a:solidFill>
+                <a:latin typeface="Microsoft YaHei"/>
+                <a:ea typeface="Microsoft YaHei"/>
+                <a:cs typeface="Microsoft YaHei"/>
+              </a:rPr>
+              <a:t>分层信息呈现</a:t>
+            </a:r>
+          </a:p>
+        </p:txBody>
+      </p:sp>
+      <p:sp>
+        <p:nvSpPr>
+          <p:cNvPr id="52" name="Rounded Rectangle 51"/>
+          <p:cNvSpPr/>
+          <p:nvPr/>
+        </p:nvSpPr>
+        <p:spPr>
+          <a:xfrm>
+            <a:off x="12418909" y="5227309"/>
+            <a:ext cx="356072" cy="178036"/>
+          </a:xfrm>
+          <a:prstGeom prst="roundRect">
+            <a:avLst>
+              <a:gd name="adj" fmla="val 50000"/>
+            </a:avLst>
+          </a:prstGeom>
+          <a:solidFill>
+            <a:srgbClr val="D8DFC8"/>
+          </a:solidFill>
+          <a:ln>
+            <a:noFill/>
+          </a:ln>
+          <a:effectLst/>
+        </p:spPr>
+        <p:txBody>
+          <a:bodyPr rtlCol="0" anchor="ctr" wrap="none" lIns="0" rIns="0" tIns="0" bIns="0"/>
+          <a:lstStyle/>
+          <a:p>
+            <a:pPr algn="ctr">
+              <a:lnSpc>
+                <a:spcPct val="128000"/>
+              </a:lnSpc>
+            </a:pPr>
+            <a:r>
+              <a:rPr sz="759" b="1">
+                <a:solidFill>
+                  <a:srgbClr val="7A8E63"/>
+                </a:solidFill>
+                <a:latin typeface="Microsoft YaHei"/>
+                <a:ea typeface="Microsoft YaHei"/>
+                <a:cs typeface="Microsoft YaHei"/>
+              </a:rPr>
+              <a:t>P1</a:t>
+            </a:r>
+          </a:p>
+        </p:txBody>
+      </p:sp>
+      <p:sp>
+        <p:nvSpPr>
+          <p:cNvPr id="53" name="需求带-基本需求"/>
+          <p:cNvSpPr/>
+          <p:nvPr/>
+        </p:nvSpPr>
+        <p:spPr>
+          <a:xfrm>
+            <a:off x="705600" y="6176836"/>
+            <a:ext cx="12966981" cy="1631999"/>
+          </a:xfrm>
+          <a:prstGeom prst="roundRect">
+            <a:avLst>
+              <a:gd name="adj" fmla="val 5454"/>
+            </a:avLst>
+          </a:prstGeom>
+          <a:solidFill>
+            <a:srgbClr val="EEDCD6">
+              <a:alpha val="45000"/>
+            </a:srgbClr>
+          </a:solidFill>
+          <a:ln>
+            <a:noFill/>
+          </a:ln>
+          <a:effectLst/>
+        </p:spPr>
+        <p:txBody>
+          <a:bodyPr rtlCol="0" anchor="ctr"/>
+          <a:lstStyle/>
+          <a:p>
+            <a:pPr algn="ctr"/>
+          </a:p>
+        </p:txBody>
+      </p:sp>
+      <p:sp>
+        <p:nvSpPr>
+          <p:cNvPr id="54" name="Rounded Rectangle 53"/>
+          <p:cNvSpPr/>
+          <p:nvPr/>
+        </p:nvSpPr>
+        <p:spPr>
+          <a:xfrm>
+            <a:off x="705600" y="6176836"/>
+            <a:ext cx="2967272" cy="1631999"/>
+          </a:xfrm>
+          <a:prstGeom prst="roundRect">
+            <a:avLst>
+              <a:gd name="adj" fmla="val 5454"/>
+            </a:avLst>
+          </a:prstGeom>
+          <a:solidFill>
+            <a:srgbClr val="AE564A"/>
+          </a:solidFill>
+          <a:ln>
+            <a:noFill/>
+          </a:ln>
+          <a:effectLst/>
+        </p:spPr>
+        <p:txBody>
+          <a:bodyPr rtlCol="0" anchor="ctr"/>
+          <a:lstStyle/>
+          <a:p>
+            <a:pPr algn="ctr"/>
+          </a:p>
+        </p:txBody>
+      </p:sp>
+      <p:sp>
+        <p:nvSpPr>
+          <p:cNvPr id="55" name="Rectangle 54"/>
+          <p:cNvSpPr/>
+          <p:nvPr/>
+        </p:nvSpPr>
+        <p:spPr>
+          <a:xfrm>
+            <a:off x="2782690" y="6176836"/>
+            <a:ext cx="1379781" cy="1631999"/>
+          </a:xfrm>
+          <a:prstGeom prst="rect">
+            <a:avLst/>
+          </a:prstGeom>
+          <a:solidFill>
+            <a:srgbClr val="AE564A"/>
+          </a:solidFill>
+          <a:ln>
+            <a:noFill/>
+          </a:ln>
+          <a:effectLst/>
+        </p:spPr>
+        <p:txBody>
+          <a:bodyPr rtlCol="0" anchor="ctr"/>
+          <a:lstStyle/>
+          <a:p>
+            <a:pPr algn="ctr"/>
+          </a:p>
+        </p:txBody>
+      </p:sp>
+      <p:sp>
+        <p:nvSpPr>
+          <p:cNvPr id="56" name="TextBox 55"/>
+          <p:cNvSpPr txBox="1"/>
+          <p:nvPr/>
+        </p:nvSpPr>
+        <p:spPr>
+          <a:xfrm>
+            <a:off x="913309" y="6356356"/>
+            <a:ext cx="995223" cy="366458"/>
+          </a:xfrm>
+          <a:prstGeom prst="rect">
+            <a:avLst/>
+          </a:prstGeom>
+          <a:noFill/>
+        </p:spPr>
+        <p:txBody>
+          <a:bodyPr wrap="none" lIns="0" rIns="0" tIns="0" bIns="0" anchor="ctr">
+            <a:spAutoFit/>
+          </a:bodyPr>
+          <a:lstStyle/>
+          <a:p>
+            <a:pPr algn="l">
+              <a:lnSpc>
+                <a:spcPct val="128000"/>
+              </a:lnSpc>
+            </a:pPr>
+            <a:r>
+              <a:rPr sz="1518" b="1">
+                <a:solidFill>
+                  <a:srgbClr val="FFFFFF"/>
+                </a:solidFill>
+                <a:latin typeface="Microsoft YaHei"/>
+                <a:ea typeface="Microsoft YaHei"/>
+                <a:cs typeface="Microsoft YaHei"/>
+              </a:rPr>
+              <a:t>基本需求</a:t>
+            </a:r>
+          </a:p>
+        </p:txBody>
+      </p:sp>
+      <p:sp>
+        <p:nvSpPr>
+          <p:cNvPr id="57" name="TextBox 56"/>
+          <p:cNvSpPr txBox="1"/>
+          <p:nvPr/>
+        </p:nvSpPr>
+        <p:spPr>
+          <a:xfrm>
+            <a:off x="1803490" y="6457243"/>
+            <a:ext cx="518130" cy="197323"/>
+          </a:xfrm>
+          <a:prstGeom prst="rect">
+            <a:avLst/>
+          </a:prstGeom>
+          <a:noFill/>
+        </p:spPr>
+        <p:txBody>
+          <a:bodyPr wrap="none" lIns="0" rIns="0" tIns="0" bIns="0" anchor="ctr">
+            <a:spAutoFit/>
+          </a:bodyPr>
+          <a:lstStyle/>
+          <a:p>
+            <a:pPr algn="l">
+              <a:lnSpc>
+                <a:spcPct val="128000"/>
+              </a:lnSpc>
+            </a:pPr>
+            <a:r>
+              <a:rPr sz="817" b="0">
+                <a:solidFill>
+                  <a:srgbClr val="FFFFFF">
+                    <a:alpha val="78000"/>
+                  </a:srgbClr>
+                </a:solidFill>
+                <a:latin typeface="Microsoft YaHei"/>
+                <a:ea typeface="Microsoft YaHei"/>
+                <a:cs typeface="Microsoft YaHei"/>
+              </a:rPr>
+              <a:t>Must-be</a:t>
+            </a:r>
+          </a:p>
+        </p:txBody>
+      </p:sp>
+      <p:sp>
+        <p:nvSpPr>
+          <p:cNvPr id="58" name="Rounded Rectangle 57"/>
+          <p:cNvSpPr/>
+          <p:nvPr/>
+        </p:nvSpPr>
+        <p:spPr>
+          <a:xfrm>
+            <a:off x="913309" y="6755454"/>
+            <a:ext cx="771490" cy="222545"/>
+          </a:xfrm>
+          <a:prstGeom prst="roundRect">
+            <a:avLst>
+              <a:gd name="adj" fmla="val 50000"/>
+            </a:avLst>
+          </a:prstGeom>
+          <a:solidFill>
+            <a:srgbClr val="FFFFFF">
+              <a:alpha val="24000"/>
+            </a:srgbClr>
+          </a:solidFill>
+          <a:ln>
+            <a:noFill/>
+          </a:ln>
+          <a:effectLst/>
+        </p:spPr>
+        <p:txBody>
+          <a:bodyPr rtlCol="0" anchor="ctr" wrap="none" lIns="0" rIns="0" tIns="0" bIns="0"/>
+          <a:lstStyle/>
+          <a:p>
+            <a:pPr algn="ctr">
+              <a:lnSpc>
+                <a:spcPct val="128000"/>
+              </a:lnSpc>
+            </a:pPr>
+            <a:r>
+              <a:rPr sz="846" b="1">
+                <a:solidFill>
+                  <a:srgbClr val="FFFFFF"/>
+                </a:solidFill>
+                <a:latin typeface="Microsoft YaHei"/>
+                <a:ea typeface="Microsoft YaHei"/>
+                <a:cs typeface="Microsoft YaHei"/>
+              </a:rPr>
+              <a:t>P0   4 项</a:t>
+            </a:r>
+          </a:p>
+        </p:txBody>
+      </p:sp>
+      <p:sp>
+        <p:nvSpPr>
+          <p:cNvPr id="59" name="TextBox 58"/>
+          <p:cNvSpPr txBox="1"/>
+          <p:nvPr/>
+        </p:nvSpPr>
+        <p:spPr>
+          <a:xfrm>
+            <a:off x="913309" y="7129701"/>
+            <a:ext cx="1087579" cy="190276"/>
+          </a:xfrm>
+          <a:prstGeom prst="rect">
+            <a:avLst/>
+          </a:prstGeom>
+          <a:noFill/>
+        </p:spPr>
+        <p:txBody>
+          <a:bodyPr wrap="none" lIns="0" rIns="0" tIns="0" bIns="0" anchor="ctr">
+            <a:spAutoFit/>
+          </a:bodyPr>
+          <a:lstStyle/>
+          <a:p>
+            <a:pPr algn="l">
+              <a:lnSpc>
+                <a:spcPct val="128000"/>
+              </a:lnSpc>
+            </a:pPr>
+            <a:r>
+              <a:rPr sz="788" b="0">
+                <a:solidFill>
+                  <a:srgbClr val="FFFFFF">
+                    <a:alpha val="88000"/>
+                  </a:srgbClr>
+                </a:solidFill>
+                <a:latin typeface="Microsoft YaHei"/>
+                <a:ea typeface="Microsoft YaHei"/>
+                <a:cs typeface="Microsoft YaHei"/>
+              </a:rPr>
+              <a:t>不满足即引发不满，</a:t>
+            </a:r>
+          </a:p>
+        </p:txBody>
+      </p:sp>
+      <p:sp>
+        <p:nvSpPr>
+          <p:cNvPr id="60" name="TextBox 59"/>
+          <p:cNvSpPr txBox="1"/>
+          <p:nvPr/>
+        </p:nvSpPr>
+        <p:spPr>
+          <a:xfrm>
+            <a:off x="913309" y="7307738"/>
+            <a:ext cx="1315911" cy="190276"/>
+          </a:xfrm>
+          <a:prstGeom prst="rect">
+            <a:avLst/>
+          </a:prstGeom>
+          <a:noFill/>
+        </p:spPr>
+        <p:txBody>
+          <a:bodyPr wrap="none" lIns="0" rIns="0" tIns="0" bIns="0" anchor="ctr">
+            <a:spAutoFit/>
+          </a:bodyPr>
+          <a:lstStyle/>
+          <a:p>
+            <a:pPr algn="l">
+              <a:lnSpc>
+                <a:spcPct val="128000"/>
+              </a:lnSpc>
+            </a:pPr>
+            <a:r>
+              <a:rPr sz="788" b="0">
+                <a:solidFill>
+                  <a:srgbClr val="FFFFFF">
+                    <a:alpha val="88000"/>
+                  </a:srgbClr>
+                </a:solidFill>
+                <a:latin typeface="Microsoft YaHei"/>
+                <a:ea typeface="Microsoft YaHei"/>
+                <a:cs typeface="Microsoft YaHei"/>
+              </a:rPr>
+              <a:t>满足亦不显著提升满意度</a:t>
+            </a:r>
+          </a:p>
+        </p:txBody>
+      </p:sp>
+      <p:sp>
+        <p:nvSpPr>
+          <p:cNvPr id="61" name="需求-清晰的路权划分"/>
+          <p:cNvSpPr/>
+          <p:nvPr/>
+        </p:nvSpPr>
+        <p:spPr>
+          <a:xfrm>
+            <a:off x="3939927" y="6607090"/>
+            <a:ext cx="1765527" cy="771490"/>
+          </a:xfrm>
+          <a:prstGeom prst="roundRect">
+            <a:avLst>
+              <a:gd name="adj" fmla="val 9615"/>
+            </a:avLst>
+          </a:prstGeom>
+          <a:solidFill>
+            <a:srgbClr val="FCFBF7"/>
+          </a:solidFill>
+          <a:ln w="10385">
+            <a:solidFill>
+              <a:srgbClr val="CE8A7C"/>
+            </a:solidFill>
+          </a:ln>
+          <a:effectLst/>
+        </p:spPr>
+        <p:txBody>
+          <a:bodyPr rtlCol="0" anchor="ctr"/>
+          <a:lstStyle/>
+          <a:p>
+            <a:pPr algn="ctr"/>
+          </a:p>
+        </p:txBody>
+      </p:sp>
+      <p:sp>
+        <p:nvSpPr>
+          <p:cNvPr id="62" name="TextBox 61"/>
+          <p:cNvSpPr txBox="1"/>
+          <p:nvPr/>
+        </p:nvSpPr>
+        <p:spPr>
+          <a:xfrm>
+            <a:off x="4186210" y="6755454"/>
+            <a:ext cx="1272960" cy="281890"/>
+          </a:xfrm>
+          <a:prstGeom prst="rect">
+            <a:avLst/>
+          </a:prstGeom>
+          <a:noFill/>
+        </p:spPr>
+        <p:txBody>
+          <a:bodyPr wrap="none" lIns="0" rIns="0" tIns="0" bIns="0" anchor="ctr">
+            <a:spAutoFit/>
+          </a:bodyPr>
+          <a:lstStyle/>
+          <a:p>
+            <a:pPr algn="ctr">
+              <a:lnSpc>
+                <a:spcPct val="128000"/>
+              </a:lnSpc>
+            </a:pPr>
+            <a:r>
+              <a:rPr sz="1168" b="1">
+                <a:solidFill>
+                  <a:srgbClr val="31332C"/>
+                </a:solidFill>
+                <a:latin typeface="Microsoft YaHei"/>
+                <a:ea typeface="Microsoft YaHei"/>
+                <a:cs typeface="Microsoft YaHei"/>
+              </a:rPr>
+              <a:t>清晰的路权划分</a:t>
+            </a:r>
+          </a:p>
+        </p:txBody>
+      </p:sp>
+      <p:sp>
+        <p:nvSpPr>
+          <p:cNvPr id="63" name="Rounded Rectangle 62"/>
+          <p:cNvSpPr/>
+          <p:nvPr/>
+        </p:nvSpPr>
+        <p:spPr>
+          <a:xfrm>
+            <a:off x="4644654" y="7052181"/>
+            <a:ext cx="356072" cy="178036"/>
+          </a:xfrm>
+          <a:prstGeom prst="roundRect">
+            <a:avLst>
+              <a:gd name="adj" fmla="val 50000"/>
+            </a:avLst>
+          </a:prstGeom>
+          <a:solidFill>
+            <a:srgbClr val="EEDCD6"/>
+          </a:solidFill>
+          <a:ln>
+            <a:noFill/>
+          </a:ln>
+          <a:effectLst/>
+        </p:spPr>
+        <p:txBody>
+          <a:bodyPr rtlCol="0" anchor="ctr" wrap="none" lIns="0" rIns="0" tIns="0" bIns="0"/>
+          <a:lstStyle/>
+          <a:p>
+            <a:pPr algn="ctr">
+              <a:lnSpc>
+                <a:spcPct val="128000"/>
+              </a:lnSpc>
+            </a:pPr>
+            <a:r>
+              <a:rPr sz="759" b="1">
+                <a:solidFill>
+                  <a:srgbClr val="AE564A"/>
+                </a:solidFill>
+                <a:latin typeface="Microsoft YaHei"/>
+                <a:ea typeface="Microsoft YaHei"/>
+                <a:cs typeface="Microsoft YaHei"/>
+              </a:rPr>
+              <a:t>P0</a:t>
+            </a:r>
+          </a:p>
+        </p:txBody>
+      </p:sp>
+      <p:sp>
+        <p:nvSpPr>
+          <p:cNvPr id="64" name="需求-交叉口冲突标注"/>
+          <p:cNvSpPr/>
+          <p:nvPr/>
+        </p:nvSpPr>
+        <p:spPr>
+          <a:xfrm>
+            <a:off x="5883490" y="6607090"/>
+            <a:ext cx="1765527" cy="771490"/>
+          </a:xfrm>
+          <a:prstGeom prst="roundRect">
+            <a:avLst>
+              <a:gd name="adj" fmla="val 9615"/>
+            </a:avLst>
+          </a:prstGeom>
+          <a:solidFill>
+            <a:srgbClr val="FCFBF7"/>
+          </a:solidFill>
+          <a:ln w="10385">
+            <a:solidFill>
+              <a:srgbClr val="CE8A7C"/>
+            </a:solidFill>
+          </a:ln>
+          <a:effectLst/>
+        </p:spPr>
+        <p:txBody>
+          <a:bodyPr rtlCol="0" anchor="ctr"/>
+          <a:lstStyle/>
+          <a:p>
+            <a:pPr algn="ctr"/>
+          </a:p>
+        </p:txBody>
+      </p:sp>
+      <p:sp>
+        <p:nvSpPr>
+          <p:cNvPr id="65" name="TextBox 64"/>
+          <p:cNvSpPr txBox="1"/>
+          <p:nvPr/>
+        </p:nvSpPr>
+        <p:spPr>
+          <a:xfrm>
+            <a:off x="6129774" y="6755454"/>
+            <a:ext cx="1272960" cy="281890"/>
+          </a:xfrm>
+          <a:prstGeom prst="rect">
+            <a:avLst/>
+          </a:prstGeom>
+          <a:noFill/>
+        </p:spPr>
+        <p:txBody>
+          <a:bodyPr wrap="none" lIns="0" rIns="0" tIns="0" bIns="0" anchor="ctr">
+            <a:spAutoFit/>
+          </a:bodyPr>
+          <a:lstStyle/>
+          <a:p>
+            <a:pPr algn="ctr">
+              <a:lnSpc>
+                <a:spcPct val="128000"/>
+              </a:lnSpc>
+            </a:pPr>
+            <a:r>
+              <a:rPr sz="1168" b="1">
+                <a:solidFill>
+                  <a:srgbClr val="31332C"/>
+                </a:solidFill>
+                <a:latin typeface="Microsoft YaHei"/>
+                <a:ea typeface="Microsoft YaHei"/>
+                <a:cs typeface="Microsoft YaHei"/>
+              </a:rPr>
+              <a:t>交叉口冲突标注</a:t>
+            </a:r>
+          </a:p>
+        </p:txBody>
+      </p:sp>
+      <p:sp>
+        <p:nvSpPr>
+          <p:cNvPr id="66" name="Rounded Rectangle 65"/>
+          <p:cNvSpPr/>
+          <p:nvPr/>
+        </p:nvSpPr>
+        <p:spPr>
+          <a:xfrm>
+            <a:off x="6588218" y="7052181"/>
+            <a:ext cx="356072" cy="178036"/>
+          </a:xfrm>
+          <a:prstGeom prst="roundRect">
+            <a:avLst>
+              <a:gd name="adj" fmla="val 50000"/>
+            </a:avLst>
+          </a:prstGeom>
+          <a:solidFill>
+            <a:srgbClr val="EEDCD6"/>
+          </a:solidFill>
+          <a:ln>
+            <a:noFill/>
+          </a:ln>
+          <a:effectLst/>
+        </p:spPr>
+        <p:txBody>
+          <a:bodyPr rtlCol="0" anchor="ctr" wrap="none" lIns="0" rIns="0" tIns="0" bIns="0"/>
+          <a:lstStyle/>
+          <a:p>
+            <a:pPr algn="ctr">
+              <a:lnSpc>
+                <a:spcPct val="128000"/>
+              </a:lnSpc>
+            </a:pPr>
+            <a:r>
+              <a:rPr sz="759" b="1">
+                <a:solidFill>
+                  <a:srgbClr val="AE564A"/>
+                </a:solidFill>
+                <a:latin typeface="Microsoft YaHei"/>
+                <a:ea typeface="Microsoft YaHei"/>
+                <a:cs typeface="Microsoft YaHei"/>
+              </a:rPr>
+              <a:t>P0</a:t>
+            </a:r>
+          </a:p>
+        </p:txBody>
+      </p:sp>
+      <p:sp>
+        <p:nvSpPr>
+          <p:cNvPr id="67" name="需求-夜间可见性保障"/>
+          <p:cNvSpPr/>
+          <p:nvPr/>
+        </p:nvSpPr>
+        <p:spPr>
+          <a:xfrm>
+            <a:off x="7827054" y="6607090"/>
+            <a:ext cx="1765527" cy="771490"/>
+          </a:xfrm>
+          <a:prstGeom prst="roundRect">
+            <a:avLst>
+              <a:gd name="adj" fmla="val 9615"/>
+            </a:avLst>
+          </a:prstGeom>
+          <a:solidFill>
+            <a:srgbClr val="FCFBF7"/>
+          </a:solidFill>
+          <a:ln w="10385">
+            <a:solidFill>
+              <a:srgbClr val="CE8A7C"/>
+            </a:solidFill>
+          </a:ln>
+          <a:effectLst/>
+        </p:spPr>
+        <p:txBody>
+          <a:bodyPr rtlCol="0" anchor="ctr"/>
+          <a:lstStyle/>
+          <a:p>
+            <a:pPr algn="ctr"/>
+          </a:p>
+        </p:txBody>
+      </p:sp>
+      <p:sp>
+        <p:nvSpPr>
+          <p:cNvPr id="68" name="TextBox 67"/>
+          <p:cNvSpPr txBox="1"/>
+          <p:nvPr/>
+        </p:nvSpPr>
+        <p:spPr>
+          <a:xfrm>
+            <a:off x="8073338" y="6755454"/>
+            <a:ext cx="1272960" cy="281890"/>
+          </a:xfrm>
+          <a:prstGeom prst="rect">
+            <a:avLst/>
+          </a:prstGeom>
+          <a:noFill/>
+        </p:spPr>
+        <p:txBody>
+          <a:bodyPr wrap="none" lIns="0" rIns="0" tIns="0" bIns="0" anchor="ctr">
+            <a:spAutoFit/>
+          </a:bodyPr>
+          <a:lstStyle/>
+          <a:p>
+            <a:pPr algn="ctr">
+              <a:lnSpc>
+                <a:spcPct val="128000"/>
+              </a:lnSpc>
+            </a:pPr>
+            <a:r>
+              <a:rPr sz="1168" b="1">
+                <a:solidFill>
+                  <a:srgbClr val="31332C"/>
+                </a:solidFill>
+                <a:latin typeface="Microsoft YaHei"/>
+                <a:ea typeface="Microsoft YaHei"/>
+                <a:cs typeface="Microsoft YaHei"/>
+              </a:rPr>
+              <a:t>夜间可见性保障</a:t>
+            </a:r>
+          </a:p>
+        </p:txBody>
+      </p:sp>
+      <p:sp>
+        <p:nvSpPr>
+          <p:cNvPr id="69" name="Rounded Rectangle 68"/>
+          <p:cNvSpPr/>
+          <p:nvPr/>
+        </p:nvSpPr>
+        <p:spPr>
+          <a:xfrm>
+            <a:off x="8531781" y="7052181"/>
+            <a:ext cx="356072" cy="178036"/>
+          </a:xfrm>
+          <a:prstGeom prst="roundRect">
+            <a:avLst>
+              <a:gd name="adj" fmla="val 50000"/>
+            </a:avLst>
+          </a:prstGeom>
+          <a:solidFill>
+            <a:srgbClr val="EEDCD6"/>
+          </a:solidFill>
+          <a:ln>
+            <a:noFill/>
+          </a:ln>
+          <a:effectLst/>
+        </p:spPr>
+        <p:txBody>
+          <a:bodyPr rtlCol="0" anchor="ctr" wrap="none" lIns="0" rIns="0" tIns="0" bIns="0"/>
+          <a:lstStyle/>
+          <a:p>
+            <a:pPr algn="ctr">
+              <a:lnSpc>
+                <a:spcPct val="128000"/>
+              </a:lnSpc>
+            </a:pPr>
+            <a:r>
+              <a:rPr sz="759" b="1">
+                <a:solidFill>
+                  <a:srgbClr val="AE564A"/>
+                </a:solidFill>
+                <a:latin typeface="Microsoft YaHei"/>
+                <a:ea typeface="Microsoft YaHei"/>
+                <a:cs typeface="Microsoft YaHei"/>
+              </a:rPr>
+              <a:t>P0</a:t>
+            </a:r>
+          </a:p>
+        </p:txBody>
+      </p:sp>
+      <p:sp>
+        <p:nvSpPr>
+          <p:cNvPr id="70" name="需求-标识适配性"/>
+          <p:cNvSpPr/>
+          <p:nvPr/>
+        </p:nvSpPr>
+        <p:spPr>
+          <a:xfrm>
+            <a:off x="9770618" y="6607090"/>
+            <a:ext cx="1765527" cy="771490"/>
+          </a:xfrm>
+          <a:prstGeom prst="roundRect">
+            <a:avLst>
+              <a:gd name="adj" fmla="val 9615"/>
+            </a:avLst>
+          </a:prstGeom>
+          <a:solidFill>
+            <a:srgbClr val="FCFBF7"/>
+          </a:solidFill>
+          <a:ln w="10385">
+            <a:solidFill>
+              <a:srgbClr val="CE8A7C"/>
+            </a:solidFill>
+          </a:ln>
+          <a:effectLst/>
+        </p:spPr>
+        <p:txBody>
+          <a:bodyPr rtlCol="0" anchor="ctr"/>
+          <a:lstStyle/>
+          <a:p>
+            <a:pPr algn="ctr"/>
+          </a:p>
+        </p:txBody>
+      </p:sp>
+      <p:sp>
+        <p:nvSpPr>
+          <p:cNvPr id="71" name="TextBox 70"/>
+          <p:cNvSpPr txBox="1"/>
+          <p:nvPr/>
+        </p:nvSpPr>
+        <p:spPr>
+          <a:xfrm>
+            <a:off x="10186036" y="6755454"/>
+            <a:ext cx="934690" cy="281890"/>
+          </a:xfrm>
+          <a:prstGeom prst="rect">
+            <a:avLst/>
+          </a:prstGeom>
+          <a:noFill/>
+        </p:spPr>
+        <p:txBody>
+          <a:bodyPr wrap="none" lIns="0" rIns="0" tIns="0" bIns="0" anchor="ctr">
+            <a:spAutoFit/>
+          </a:bodyPr>
+          <a:lstStyle/>
+          <a:p>
+            <a:pPr algn="ctr">
+              <a:lnSpc>
+                <a:spcPct val="128000"/>
+              </a:lnSpc>
+            </a:pPr>
+            <a:r>
+              <a:rPr sz="1168" b="1">
+                <a:solidFill>
+                  <a:srgbClr val="31332C"/>
+                </a:solidFill>
+                <a:latin typeface="Microsoft YaHei"/>
+                <a:ea typeface="Microsoft YaHei"/>
+                <a:cs typeface="Microsoft YaHei"/>
+              </a:rPr>
+              <a:t>标识适配性</a:t>
+            </a:r>
+          </a:p>
+        </p:txBody>
+      </p:sp>
+      <p:sp>
+        <p:nvSpPr>
+          <p:cNvPr id="72" name="Rounded Rectangle 71"/>
+          <p:cNvSpPr/>
+          <p:nvPr/>
+        </p:nvSpPr>
+        <p:spPr>
+          <a:xfrm>
+            <a:off x="10475345" y="7052181"/>
+            <a:ext cx="356072" cy="178036"/>
+          </a:xfrm>
+          <a:prstGeom prst="roundRect">
+            <a:avLst>
+              <a:gd name="adj" fmla="val 50000"/>
+            </a:avLst>
+          </a:prstGeom>
+          <a:solidFill>
+            <a:srgbClr val="EEDCD6"/>
+          </a:solidFill>
+          <a:ln>
+            <a:noFill/>
+          </a:ln>
+          <a:effectLst/>
+        </p:spPr>
+        <p:txBody>
+          <a:bodyPr rtlCol="0" anchor="ctr" wrap="none" lIns="0" rIns="0" tIns="0" bIns="0"/>
+          <a:lstStyle/>
+          <a:p>
+            <a:pPr algn="ctr">
+              <a:lnSpc>
+                <a:spcPct val="128000"/>
+              </a:lnSpc>
+            </a:pPr>
+            <a:r>
+              <a:rPr sz="759" b="1">
+                <a:solidFill>
+                  <a:srgbClr val="AE564A"/>
+                </a:solidFill>
+                <a:latin typeface="Microsoft YaHei"/>
+                <a:ea typeface="Microsoft YaHei"/>
+                <a:cs typeface="Microsoft YaHei"/>
+              </a:rPr>
+              <a:t>P0</a:t>
+            </a:r>
+          </a:p>
+        </p:txBody>
+      </p:sp>
+      <p:sp>
+        <p:nvSpPr>
+          <p:cNvPr id="73" name="Freeform 72"/>
+          <p:cNvSpPr/>
+          <p:nvPr/>
+        </p:nvSpPr>
+        <p:spPr>
+          <a:xfrm>
+            <a:off x="13806109" y="2497418"/>
+            <a:ext cx="637963" cy="5311418"/>
+          </a:xfrm>
+          <a:custGeom>
+            <a:avLst/>
+            <a:gdLst/>
+            <a:ahLst/>
+            <a:cxnLst/>
+            <a:rect l="l" t="t" r="r" b="b"/>
+            <a:pathLst>
+              <a:path w="637963" h="5311418">
+                <a:moveTo>
+                  <a:pt x="133527" y="5311418"/>
+                </a:moveTo>
+                <a:lnTo>
+                  <a:pt x="504436" y="5311418"/>
+                </a:lnTo>
+                <a:lnTo>
+                  <a:pt x="504436" y="445091"/>
+                </a:lnTo>
+                <a:lnTo>
+                  <a:pt x="637963" y="445091"/>
+                </a:lnTo>
+                <a:lnTo>
+                  <a:pt x="318981" y="0"/>
+                </a:lnTo>
+                <a:lnTo>
+                  <a:pt x="0" y="445091"/>
+                </a:lnTo>
+                <a:lnTo>
+                  <a:pt x="133527" y="445091"/>
+                </a:lnTo>
+                <a:close/>
+              </a:path>
+            </a:pathLst>
+          </a:custGeom>
+          <a:solidFill>
+            <a:srgbClr val="C0CCA9"/>
+          </a:solidFill>
+          <a:ln>
+            <a:noFill/>
+          </a:ln>
+          <a:effectLst/>
+        </p:spPr>
+        <p:txBody>
+          <a:bodyPr rtlCol="0" anchor="ctr"/>
+          <a:lstStyle/>
+          <a:p>
+            <a:pPr algn="ctr"/>
+          </a:p>
+        </p:txBody>
+      </p:sp>
+      <p:sp>
+        <p:nvSpPr>
+          <p:cNvPr id="74" name="TextBox 73"/>
+          <p:cNvSpPr txBox="1"/>
+          <p:nvPr/>
+        </p:nvSpPr>
+        <p:spPr>
+          <a:xfrm>
+            <a:off x="13961890" y="4871236"/>
+            <a:ext cx="326400" cy="1513309"/>
+          </a:xfrm>
+          <a:prstGeom prst="rect">
+            <a:avLst/>
+          </a:prstGeom>
+          <a:noFill/>
+        </p:spPr>
+        <p:txBody>
+          <a:bodyPr wrap="none" lIns="0" rIns="0" tIns="0" bIns="0" anchor="ctr">
+            <a:spAutoFit/>
+          </a:bodyPr>
+          <a:lstStyle/>
+          <a:p>
+            <a:pPr algn="ctr">
+              <a:lnSpc>
+                <a:spcPct val="128000"/>
+              </a:lnSpc>
+            </a:pPr>
+            <a:r>
+              <a:rPr sz="1285" b="1">
+                <a:solidFill>
+                  <a:srgbClr val="465736"/>
+                </a:solidFill>
+                <a:latin typeface="Microsoft YaHei"/>
+                <a:ea typeface="Microsoft YaHei"/>
+                <a:cs typeface="Microsoft YaHei"/>
+              </a:rPr>
+              <a:t>先</a:t>
+            </a:r>
+          </a:p>
+          <a:p>
+            <a:pPr algn="ctr">
+              <a:lnSpc>
+                <a:spcPct val="128000"/>
+              </a:lnSpc>
+            </a:pPr>
+            <a:r>
+              <a:rPr sz="1285" b="1">
+                <a:solidFill>
+                  <a:srgbClr val="465736"/>
+                </a:solidFill>
+                <a:latin typeface="Microsoft YaHei"/>
+                <a:ea typeface="Microsoft YaHei"/>
+                <a:cs typeface="Microsoft YaHei"/>
+              </a:rPr>
+              <a:t>基</a:t>
+            </a:r>
+          </a:p>
+          <a:p>
+            <a:pPr algn="ctr">
+              <a:lnSpc>
+                <a:spcPct val="128000"/>
+              </a:lnSpc>
+            </a:pPr>
+            <a:r>
+              <a:rPr sz="1285" b="1">
+                <a:solidFill>
+                  <a:srgbClr val="465736"/>
+                </a:solidFill>
+                <a:latin typeface="Microsoft YaHei"/>
+                <a:ea typeface="Microsoft YaHei"/>
+                <a:cs typeface="Microsoft YaHei"/>
+              </a:rPr>
+              <a:t>础</a:t>
+            </a:r>
+          </a:p>
+          <a:p>
+            <a:pPr algn="ctr">
+              <a:lnSpc>
+                <a:spcPct val="128000"/>
+              </a:lnSpc>
+            </a:pPr>
+            <a:r>
+              <a:rPr sz="1285" b="1">
+                <a:solidFill>
+                  <a:srgbClr val="465736"/>
+                </a:solidFill>
+                <a:latin typeface="Microsoft YaHei"/>
+                <a:ea typeface="Microsoft YaHei"/>
+                <a:cs typeface="Microsoft YaHei"/>
+              </a:rPr>
+              <a:t>后</a:t>
+            </a:r>
+          </a:p>
+          <a:p>
+            <a:pPr algn="ctr">
+              <a:lnSpc>
+                <a:spcPct val="128000"/>
+              </a:lnSpc>
+            </a:pPr>
+            <a:r>
+              <a:rPr sz="1285" b="1">
+                <a:solidFill>
+                  <a:srgbClr val="465736"/>
+                </a:solidFill>
+                <a:latin typeface="Microsoft YaHei"/>
+                <a:ea typeface="Microsoft YaHei"/>
+                <a:cs typeface="Microsoft YaHei"/>
+              </a:rPr>
+              <a:t>提</a:t>
+            </a:r>
+          </a:p>
+          <a:p>
+            <a:pPr algn="ctr">
+              <a:lnSpc>
+                <a:spcPct val="128000"/>
+              </a:lnSpc>
+            </a:pPr>
+            <a:r>
+              <a:rPr sz="1285" b="1">
+                <a:solidFill>
+                  <a:srgbClr val="465736"/>
+                </a:solidFill>
+                <a:latin typeface="Microsoft YaHei"/>
+                <a:ea typeface="Microsoft YaHei"/>
+                <a:cs typeface="Microsoft YaHei"/>
+              </a:rPr>
+              <a:t>升</a:t>
+            </a:r>
+          </a:p>
+        </p:txBody>
+      </p:sp>
+      <p:sp>
+        <p:nvSpPr>
+          <p:cNvPr id="75" name="TextBox 74"/>
+          <p:cNvSpPr txBox="1"/>
+          <p:nvPr/>
+        </p:nvSpPr>
+        <p:spPr>
+          <a:xfrm>
+            <a:off x="13998981" y="7000254"/>
+            <a:ext cx="252218" cy="771490"/>
+          </a:xfrm>
+          <a:prstGeom prst="rect">
+            <a:avLst/>
+          </a:prstGeom>
+          <a:noFill/>
+        </p:spPr>
+        <p:txBody>
+          <a:bodyPr wrap="none" lIns="0" rIns="0" tIns="0" bIns="0" anchor="ctr">
+            <a:spAutoFit/>
+          </a:bodyPr>
+          <a:lstStyle/>
+          <a:p>
+            <a:pPr algn="ctr">
+              <a:lnSpc>
+                <a:spcPct val="128000"/>
+              </a:lnSpc>
+            </a:pPr>
+            <a:r>
+              <a:rPr sz="817" b="0">
+                <a:solidFill>
+                  <a:srgbClr val="5A5D52"/>
+                </a:solidFill>
+                <a:latin typeface="Microsoft YaHei"/>
+                <a:ea typeface="Microsoft YaHei"/>
+                <a:cs typeface="Microsoft YaHei"/>
+              </a:rPr>
+              <a:t>实</a:t>
+            </a:r>
+          </a:p>
+          <a:p>
+            <a:pPr algn="ctr">
+              <a:lnSpc>
+                <a:spcPct val="128000"/>
+              </a:lnSpc>
+            </a:pPr>
+            <a:r>
+              <a:rPr sz="817" b="0">
+                <a:solidFill>
+                  <a:srgbClr val="5A5D52"/>
+                </a:solidFill>
+                <a:latin typeface="Microsoft YaHei"/>
+                <a:ea typeface="Microsoft YaHei"/>
+                <a:cs typeface="Microsoft YaHei"/>
+              </a:rPr>
+              <a:t>施</a:t>
+            </a:r>
+          </a:p>
+          <a:p>
+            <a:pPr algn="ctr">
+              <a:lnSpc>
+                <a:spcPct val="128000"/>
+              </a:lnSpc>
+            </a:pPr>
+            <a:r>
+              <a:rPr sz="817" b="0">
+                <a:solidFill>
+                  <a:srgbClr val="5A5D52"/>
+                </a:solidFill>
+                <a:latin typeface="Microsoft YaHei"/>
+                <a:ea typeface="Microsoft YaHei"/>
+                <a:cs typeface="Microsoft YaHei"/>
+              </a:rPr>
+              <a:t>顺</a:t>
+            </a:r>
+          </a:p>
+          <a:p>
+            <a:pPr algn="ctr">
+              <a:lnSpc>
+                <a:spcPct val="128000"/>
+              </a:lnSpc>
+            </a:pPr>
+            <a:r>
+              <a:rPr sz="817" b="0">
+                <a:solidFill>
+                  <a:srgbClr val="5A5D52"/>
+                </a:solidFill>
+                <a:latin typeface="Microsoft YaHei"/>
+                <a:ea typeface="Microsoft YaHei"/>
+                <a:cs typeface="Microsoft YaHei"/>
+              </a:rPr>
+              <a:t>序</a:t>
+            </a:r>
+          </a:p>
+        </p:txBody>
+      </p:sp>
+      <p:sp>
+        <p:nvSpPr>
+          <p:cNvPr id="76" name="Rounded Rectangle 75"/>
+          <p:cNvSpPr/>
+          <p:nvPr/>
+        </p:nvSpPr>
+        <p:spPr>
+          <a:xfrm>
+            <a:off x="705600" y="8135236"/>
+            <a:ext cx="13708800" cy="830836"/>
+          </a:xfrm>
+          <a:prstGeom prst="roundRect">
+            <a:avLst>
+              <a:gd name="adj" fmla="val 8928"/>
+            </a:avLst>
+          </a:prstGeom>
+          <a:solidFill>
+            <a:srgbClr val="E8EBDE"/>
+          </a:solidFill>
+          <a:ln>
+            <a:noFill/>
+          </a:ln>
+          <a:effectLst/>
+        </p:spPr>
+        <p:txBody>
+          <a:bodyPr rtlCol="0" anchor="ctr"/>
+          <a:lstStyle/>
+          <a:p>
+            <a:pPr algn="ctr"/>
+          </a:p>
+        </p:txBody>
+      </p:sp>
+      <p:sp>
+        <p:nvSpPr>
+          <p:cNvPr id="77" name="TextBox 76"/>
+          <p:cNvSpPr txBox="1"/>
+          <p:nvPr/>
+        </p:nvSpPr>
+        <p:spPr>
+          <a:xfrm>
+            <a:off x="913309" y="8247992"/>
+            <a:ext cx="341829" cy="225512"/>
+          </a:xfrm>
+          <a:prstGeom prst="rect">
+            <a:avLst/>
+          </a:prstGeom>
+          <a:noFill/>
+        </p:spPr>
+        <p:txBody>
+          <a:bodyPr wrap="none" lIns="0" rIns="0" tIns="0" bIns="0" anchor="ctr">
+            <a:spAutoFit/>
+          </a:bodyPr>
+          <a:lstStyle/>
+          <a:p>
+            <a:pPr algn="l">
+              <a:lnSpc>
+                <a:spcPct val="128000"/>
+              </a:lnSpc>
+            </a:pPr>
+            <a:r>
+              <a:rPr sz="934" b="1">
+                <a:solidFill>
+                  <a:srgbClr val="465736"/>
+                </a:solidFill>
+                <a:latin typeface="Microsoft YaHei"/>
+                <a:ea typeface="Microsoft YaHei"/>
+                <a:cs typeface="Microsoft YaHei"/>
+              </a:rPr>
+              <a:t>说明</a:t>
+            </a:r>
+          </a:p>
+        </p:txBody>
+      </p:sp>
+      <p:sp>
+        <p:nvSpPr>
+          <p:cNvPr id="78" name="TextBox 77"/>
+          <p:cNvSpPr txBox="1"/>
+          <p:nvPr/>
+        </p:nvSpPr>
+        <p:spPr>
+          <a:xfrm>
+            <a:off x="1402909" y="8267280"/>
+            <a:ext cx="8953715" cy="197323"/>
+          </a:xfrm>
+          <a:prstGeom prst="rect">
+            <a:avLst/>
+          </a:prstGeom>
+          <a:noFill/>
+        </p:spPr>
+        <p:txBody>
+          <a:bodyPr wrap="none" lIns="0" rIns="0" tIns="0" bIns="0" anchor="ctr">
+            <a:spAutoFit/>
+          </a:bodyPr>
+          <a:lstStyle/>
+          <a:p>
+            <a:pPr algn="l">
+              <a:lnSpc>
+                <a:spcPct val="128000"/>
+              </a:lnSpc>
+            </a:pPr>
+            <a:r>
+              <a:rPr sz="817" b="0">
+                <a:solidFill>
+                  <a:srgbClr val="5A5D52"/>
+                </a:solidFill>
+                <a:latin typeface="Microsoft YaHei"/>
+                <a:ea typeface="Microsoft YaHei"/>
+                <a:cs typeface="Microsoft YaHei"/>
+              </a:rPr>
+              <a:t>三类需求呈层级关系：基本需求是其余两类的实现前提——盲区提示与安全路径指引须以清晰的路权划分为基础，社会规范可视化与情感化设计亦以基本需求的满足为条件。</a:t>
+            </a:r>
+          </a:p>
+        </p:txBody>
+      </p:sp>
+      <p:sp>
+        <p:nvSpPr>
+          <p:cNvPr id="79" name="TextBox 78"/>
+          <p:cNvSpPr txBox="1"/>
+          <p:nvPr/>
+        </p:nvSpPr>
+        <p:spPr>
+          <a:xfrm>
+            <a:off x="913309" y="8564007"/>
+            <a:ext cx="8610372" cy="197323"/>
+          </a:xfrm>
+          <a:prstGeom prst="rect">
+            <a:avLst/>
+          </a:prstGeom>
+          <a:noFill/>
+        </p:spPr>
+        <p:txBody>
+          <a:bodyPr wrap="none" lIns="0" rIns="0" tIns="0" bIns="0" anchor="ctr">
+            <a:spAutoFit/>
+          </a:bodyPr>
+          <a:lstStyle/>
+          <a:p>
+            <a:pPr algn="l">
+              <a:lnSpc>
+                <a:spcPct val="128000"/>
+              </a:lnSpc>
+            </a:pPr>
+            <a:r>
+              <a:rPr sz="817" b="0">
+                <a:solidFill>
+                  <a:srgbClr val="5A5D52"/>
+                </a:solidFill>
+                <a:latin typeface="Microsoft YaHei"/>
+                <a:ea typeface="Microsoft YaHei"/>
+                <a:cs typeface="Microsoft YaHei"/>
+              </a:rPr>
+              <a:t>故系统实施遵循“先基础后提升”的顺序：基本需求首轮全部落地，期望需求次轮实现，兴奋需求作为增值项择机部署。各需求的满意度系数与不满意度系数见表34。</a:t>
+            </a:r>
+          </a:p>
+        </p:txBody>
+      </p:sp>
+      <p:cxnSp>
+        <p:nvCxnSpPr>
+          <p:cNvPr id="80" name="Connector 79"/>
+          <p:cNvCxnSpPr/>
+          <p:nvPr/>
+        </p:nvCxnSpPr>
+        <p:spPr>
+          <a:xfrm>
+            <a:off x="631418" y="9158945"/>
+            <a:ext cx="13857163" cy="0"/>
+          </a:xfrm>
+          <a:prstGeom prst="line">
+            <a:avLst/>
+          </a:prstGeom>
+          <a:ln w="9643">
+            <a:solidFill>
+              <a:srgbClr val="D2D2C8"/>
+            </a:solidFill>
+          </a:ln>
+          <a:effectLst/>
+        </p:spPr>
+      </p:cxnSp>
+      <p:sp>
+        <p:nvSpPr>
+          <p:cNvPr id="81" name="TextBox 80"/>
+          <p:cNvSpPr txBox="1"/>
+          <p:nvPr/>
+        </p:nvSpPr>
+        <p:spPr>
+          <a:xfrm>
+            <a:off x="631418" y="9216436"/>
+            <a:ext cx="2027110" cy="176181"/>
+          </a:xfrm>
+          <a:prstGeom prst="rect">
+            <a:avLst/>
+          </a:prstGeom>
+          <a:noFill/>
+        </p:spPr>
+        <p:txBody>
+          <a:bodyPr wrap="none" lIns="0" rIns="0" tIns="0" bIns="0" anchor="ctr">
+            <a:spAutoFit/>
+          </a:bodyPr>
+          <a:lstStyle/>
+          <a:p>
+            <a:pPr algn="l">
+              <a:lnSpc>
+                <a:spcPct val="128000"/>
+              </a:lnSpc>
+            </a:pPr>
+            <a:r>
+              <a:rPr sz="730" b="0">
+                <a:solidFill>
+                  <a:srgbClr val="8A8D80"/>
+                </a:solidFill>
+                <a:latin typeface="Microsoft YaHei"/>
+                <a:ea typeface="Microsoft YaHei"/>
+                <a:cs typeface="Microsoft YaHei"/>
+              </a:rPr>
+              <a:t>图8  高校共享道路安全引导系统需求清单</a:t>
+            </a:r>
+          </a:p>
+        </p:txBody>
+      </p:sp>
+      <p:sp>
+        <p:nvSpPr>
+          <p:cNvPr id="82" name="TextBox 81"/>
+          <p:cNvSpPr txBox="1"/>
+          <p:nvPr/>
+        </p:nvSpPr>
+        <p:spPr>
+          <a:xfrm>
+            <a:off x="11652796" y="9216436"/>
+            <a:ext cx="2835785" cy="176181"/>
+          </a:xfrm>
+          <a:prstGeom prst="rect">
+            <a:avLst/>
+          </a:prstGeom>
+          <a:noFill/>
+        </p:spPr>
+        <p:txBody>
+          <a:bodyPr wrap="none" lIns="0" rIns="0" tIns="0" bIns="0" anchor="ctr">
+            <a:spAutoFit/>
+          </a:bodyPr>
+          <a:lstStyle/>
+          <a:p>
+            <a:pPr algn="r">
+              <a:lnSpc>
+                <a:spcPct val="128000"/>
+              </a:lnSpc>
+            </a:pPr>
+            <a:r>
+              <a:rPr sz="730" b="0">
+                <a:solidFill>
+                  <a:srgbClr val="8A8D80"/>
+                </a:solidFill>
+                <a:latin typeface="Microsoft YaHei"/>
+                <a:ea typeface="Microsoft YaHei"/>
+                <a:cs typeface="Microsoft YaHei"/>
+              </a:rPr>
+              <a:t>需求项与分类取自表34《基于KANO模型的需求分类统计表》</a:t>
+            </a:r>
+          </a:p>
+        </p:txBody>
+      </p:sp>
+    </p:spTree>
+  </p:cSld>
+  <p:clrMapOvr>
+    <a:masterClrMapping/>
+  </p:clrMapOvr>
+</p:sld>
+</file>
+
+<file path=ppt/slides/slide5.xml><?xml version="1.0" encoding="utf-8"?>
 <p:sld xmlns:a="http://schemas.openxmlformats.org/drawingml/2006/main" xmlns:p="http://schemas.openxmlformats.org/presentationml/2006/main" xmlns:r="http://schemas.openxmlformats.org/officeDocument/2006/relationships">
   <p:cSld>
     <p:spTree>
